--- a/presentations/Grunitech_Project_LLM_and_fine-tuning_consolidated_shorter.pptx
+++ b/presentations/Grunitech_Project_LLM_and_fine-tuning_consolidated_shorter.pptx
@@ -26,6 +26,7 @@
     <p:sldId id="261" r:id="rId19"/>
     <p:sldId id="262" r:id="rId20"/>
     <p:sldId id="263" r:id="rId21"/>
+    <p:sldId id="280" r:id="rId39"/>
     <p:sldId id="264" r:id="rId22"/>
     <p:sldId id="265" r:id="rId23"/>
     <p:sldId id="266" r:id="rId24"/>
@@ -4681,6 +4682,94 @@
 </p:notes>
 </file>
 
+<file path=ppt/notesSlides/notesSlide25.xml><?xml version="1.0" encoding="utf-8"?>
+<p:notes xmlns:a="http://schemas.openxmlformats.org/drawingml/2006/main" xmlns:p="http://schemas.openxmlformats.org/presentationml/2006/main" xmlns:r="http://schemas.openxmlformats.org/officeDocument/2006/relationships">
+  <p:cSld>
+    <p:spTree>
+      <p:nvGrpSpPr>
+        <p:cNvPr id="1" name=""/>
+        <p:cNvGrpSpPr/>
+        <p:nvPr/>
+      </p:nvGrpSpPr>
+      <p:grpSpPr>
+        <a:xfrm>
+          <a:off x="0" y="0"/>
+          <a:ext cx="0" cy="0"/>
+          <a:chOff x="0" y="0"/>
+          <a:chExt cx="0" cy="0"/>
+        </a:xfrm>
+      </p:grpSpPr>
+      <p:sp>
+        <p:nvSpPr>
+          <p:cNvPr id="2" name="Slide Image Placeholder 1"/>
+          <p:cNvSpPr>
+            <a:spLocks noGrp="1"/>
+          </p:cNvSpPr>
+          <p:nvPr>
+            <p:ph type="sldImg"/>
+          </p:nvPr>
+        </p:nvSpPr>
+        <p:spPr/>
+      </p:sp>
+      <p:sp>
+        <p:nvSpPr>
+          <p:cNvPr id="3" name="Notes Placeholder 2"/>
+          <p:cNvSpPr>
+            <a:spLocks noGrp="1"/>
+          </p:cNvSpPr>
+          <p:nvPr>
+            <p:ph type="body"/>
+          </p:nvPr>
+        </p:nvSpPr>
+        <p:spPr/>
+        <p:txBody>
+          <a:bodyPr/>
+          <a:lstStyle/>
+          <a:p>
+            <a:r>
+              <a:t>One more data check before any model: is 90 minutes even the right thing to predict?</a:t>
+            </a:r>
+          </a:p>
+          <a:p/>
+          <a:p>
+            <a:r>
+              <a:t>We bucketed the realised move into Loss, Neutral and Gain at a half-percent threshold. The Neutral column dominates every row -- 52% of articles are followed by a move smaller than half a percent. More than half the corpus is "nothing happened".</a:t>
+            </a:r>
+          </a:p>
+          <a:p/>
+          <a:p>
+            <a:r>
+              <a:t>And of the ones that did move: 50.2% down, 49.8% up, with no ordering by sentiment.</a:t>
+            </a:r>
+          </a:p>
+          <a:p/>
+          <a:p>
+            <a:r>
+              <a:t>We have the script to extend this to 24-hour and 7-day windows; those columns are not populated yet.</a:t>
+            </a:r>
+          </a:p>
+        </p:txBody>
+      </p:sp>
+      <p:sp>
+        <p:nvSpPr>
+          <p:cNvPr id="4" name="Slide Number Placeholder 3"/>
+          <p:cNvSpPr>
+            <a:spLocks noGrp="1"/>
+          </p:cNvSpPr>
+          <p:nvPr>
+            <p:ph type="sldNum" idx="14"/>
+          </p:nvPr>
+        </p:nvSpPr>
+        <p:spPr/>
+      </p:sp>
+    </p:spTree>
+  </p:cSld>
+  <p:clrMapOvr>
+    <a:masterClrMapping/>
+  </p:clrMapOvr>
+</p:notes>
+</file>
+
 <file path=ppt/notesSlides/notesSlide3.xml><?xml version="1.0" encoding="utf-8"?>
 <p:notes xmlns:a="http://schemas.openxmlformats.org/drawingml/2006/main" xmlns:p="http://schemas.openxmlformats.org/presentationml/2006/main" xmlns:r="http://schemas.openxmlformats.org/officeDocument/2006/relationships" xmlns:p14="http://schemas.microsoft.com/office/powerpoint/2010/main" xmlns:p15="http://schemas.microsoft.com/office/powerpoint/2012/main" xmlns:mc="http://schemas.openxmlformats.org/markup-compatibility/2006">
   <p:cSld>
@@ -11035,6 +11124,133 @@
       </p:grpSpPr>
       <p:sp>
         <p:nvSpPr>
+          <p:cNvPr id="60" name="PlaceHolder 1"/>
+          <p:cNvSpPr>
+            <a:spLocks noGrp="1"/>
+          </p:cNvSpPr>
+          <p:nvPr>
+            <p:ph type="title"/>
+          </p:nvPr>
+        </p:nvSpPr>
+        <p:spPr>
+          <a:xfrm>
+            <a:off x="311760" y="744480"/>
+            <a:ext cx="8520120" cy="2052360"/>
+          </a:xfrm>
+          <a:prstGeom prst="rect">
+            <a:avLst/>
+          </a:prstGeom>
+          <a:noFill/>
+          <a:ln w="0">
+            <a:noFill/>
+          </a:ln>
+        </p:spPr>
+        <p:txBody>
+          <a:bodyPr lIns="91440" rIns="91440" tIns="91440" bIns="91440" anchor="b">
+            <a:normAutofit/>
+          </a:bodyPr>
+          <a:p>
+            <a:pPr indent="0" algn="ctr">
+              <a:lnSpc>
+                <a:spcPct val="100000"/>
+              </a:lnSpc>
+              <a:buNone/>
+              <a:tabLst>
+                <a:tab algn="l" pos="0"/>
+              </a:tabLst>
+            </a:pPr>
+            <a:r>
+              <a:rPr b="0" lang="en" sz="5200" spc="-1" strike="noStrike">
+                <a:solidFill>
+                  <a:schemeClr val="dk1"/>
+                </a:solidFill>
+                <a:latin typeface="Arial"/>
+                <a:ea typeface="Arial"/>
+              </a:rPr>
+              <a:t>Architecture</a:t>
+            </a:r>
+            <a:endParaRPr b="0" lang="en-US" sz="5200" spc="-1" strike="noStrike">
+              <a:solidFill>
+                <a:srgbClr val="000000"/>
+              </a:solidFill>
+              <a:latin typeface="Arial"/>
+            </a:endParaRPr>
+          </a:p>
+        </p:txBody>
+      </p:sp>
+      <p:sp>
+        <p:nvSpPr>
+          <p:cNvPr id="61" name="PlaceHolder 2"/>
+          <p:cNvSpPr>
+            <a:spLocks noGrp="1"/>
+          </p:cNvSpPr>
+          <p:nvPr>
+            <p:ph type="subTitle"/>
+          </p:nvPr>
+        </p:nvSpPr>
+        <p:spPr>
+          <a:xfrm>
+            <a:off x="311760" y="2834280"/>
+            <a:ext cx="8520120" cy="792360"/>
+          </a:xfrm>
+          <a:prstGeom prst="rect">
+            <a:avLst/>
+          </a:prstGeom>
+          <a:noFill/>
+          <a:ln w="0">
+            <a:noFill/>
+          </a:ln>
+        </p:spPr>
+        <p:txBody>
+          <a:bodyPr lIns="91440" rIns="91440" tIns="91440" bIns="91440" anchor="t">
+            <a:normAutofit/>
+          </a:bodyPr>
+          <a:p>
+            <a:pPr indent="0" algn="ctr">
+              <a:buNone/>
+            </a:pPr>
+            <a:endParaRPr b="0" lang="en-US" sz="2800" spc="-1" strike="noStrike">
+              <a:solidFill>
+                <a:schemeClr val="dk2"/>
+              </a:solidFill>
+              <a:latin typeface="Arial"/>
+              <a:ea typeface="Arial"/>
+            </a:endParaRPr>
+          </a:p>
+        </p:txBody>
+      </p:sp>
+    </p:spTree>
+  </p:cSld>
+  <mc:AlternateContent>
+    <mc:Choice Requires="p14">
+      <p:transition spd="slow" p14:dur="2000"/>
+    </mc:Choice>
+    <mc:Fallback>
+      <p:transition spd="slow"/>
+    </mc:Fallback>
+  </mc:AlternateContent>
+</p:sld>
+</file>
+
+<file path=ppt/slides/slide11.xml><?xml version="1.0" encoding="utf-8"?>
+<p:sld xmlns:a="http://schemas.openxmlformats.org/drawingml/2006/main" xmlns:p="http://schemas.openxmlformats.org/presentationml/2006/main" xmlns:r="http://schemas.openxmlformats.org/officeDocument/2006/relationships" xmlns:p14="http://schemas.microsoft.com/office/powerpoint/2010/main" xmlns:p15="http://schemas.microsoft.com/office/powerpoint/2012/main" xmlns:mc="http://schemas.openxmlformats.org/markup-compatibility/2006">
+  <p:cSld>
+    <p:spTree>
+      <p:nvGrpSpPr>
+        <p:cNvPr id="1" name=""/>
+        <p:cNvGrpSpPr/>
+        <p:nvPr/>
+      </p:nvGrpSpPr>
+      <p:grpSpPr>
+        <a:xfrm>
+          <a:off x="0" y="0"/>
+          <a:ext cx="0" cy="0"/>
+          <a:chOff x="0" y="0"/>
+          <a:chExt cx="0" cy="0"/>
+        </a:xfrm>
+      </p:grpSpPr>
+      <p:sp>
+        <p:nvSpPr>
           <p:cNvPr id="62" name="PlaceHolder 1"/>
           <p:cNvSpPr>
             <a:spLocks noGrp="1"/>
@@ -11245,7 +11461,7 @@
 </p:sld>
 </file>
 
-<file path=ppt/slides/slide11.xml><?xml version="1.0" encoding="utf-8"?>
+<file path=ppt/slides/slide12.xml><?xml version="1.0" encoding="utf-8"?>
 <p:sld xmlns:a="http://schemas.openxmlformats.org/drawingml/2006/main" xmlns:p="http://schemas.openxmlformats.org/presentationml/2006/main" xmlns:r="http://schemas.openxmlformats.org/officeDocument/2006/relationships" xmlns:p14="http://schemas.microsoft.com/office/powerpoint/2010/main" xmlns:p15="http://schemas.microsoft.com/office/powerpoint/2012/main" xmlns:mc="http://schemas.openxmlformats.org/markup-compatibility/2006">
   <p:cSld>
     <p:spTree>
@@ -12003,7 +12219,7 @@
 </p:sld>
 </file>
 
-<file path=ppt/slides/slide12.xml><?xml version="1.0" encoding="utf-8"?>
+<file path=ppt/slides/slide13.xml><?xml version="1.0" encoding="utf-8"?>
 <p:sld xmlns:a="http://schemas.openxmlformats.org/drawingml/2006/main" xmlns:p="http://schemas.openxmlformats.org/presentationml/2006/main" xmlns:r="http://schemas.openxmlformats.org/officeDocument/2006/relationships" xmlns:p14="http://schemas.microsoft.com/office/powerpoint/2010/main" xmlns:p15="http://schemas.microsoft.com/office/powerpoint/2012/main" xmlns:mc="http://schemas.openxmlformats.org/markup-compatibility/2006">
   <p:cSld>
     <p:spTree>
@@ -12575,7 +12791,7 @@
 </p:sld>
 </file>
 
-<file path=ppt/slides/slide13.xml><?xml version="1.0" encoding="utf-8"?>
+<file path=ppt/slides/slide14.xml><?xml version="1.0" encoding="utf-8"?>
 <p:sld xmlns:a="http://schemas.openxmlformats.org/drawingml/2006/main" xmlns:p="http://schemas.openxmlformats.org/presentationml/2006/main" xmlns:r="http://schemas.openxmlformats.org/officeDocument/2006/relationships" xmlns:p14="http://schemas.microsoft.com/office/powerpoint/2010/main" xmlns:p15="http://schemas.microsoft.com/office/powerpoint/2012/main" xmlns:mc="http://schemas.openxmlformats.org/markup-compatibility/2006">
   <p:cSld>
     <p:spTree>
@@ -12702,7 +12918,7 @@
 </p:sld>
 </file>
 
-<file path=ppt/slides/slide14.xml><?xml version="1.0" encoding="utf-8"?>
+<file path=ppt/slides/slide15.xml><?xml version="1.0" encoding="utf-8"?>
 <p:sld xmlns:a="http://schemas.openxmlformats.org/drawingml/2006/main" xmlns:p="http://schemas.openxmlformats.org/presentationml/2006/main" xmlns:r="http://schemas.openxmlformats.org/officeDocument/2006/relationships" xmlns:p14="http://schemas.microsoft.com/office/powerpoint/2010/main" xmlns:p15="http://schemas.microsoft.com/office/powerpoint/2012/main" xmlns:mc="http://schemas.openxmlformats.org/markup-compatibility/2006">
   <p:cSld>
     <p:spTree>
@@ -12811,7 +13027,7 @@
 </p:sld>
 </file>
 
-<file path=ppt/slides/slide15.xml><?xml version="1.0" encoding="utf-8"?>
+<file path=ppt/slides/slide16.xml><?xml version="1.0" encoding="utf-8"?>
 <p:sld xmlns:a="http://schemas.openxmlformats.org/drawingml/2006/main" xmlns:p="http://schemas.openxmlformats.org/presentationml/2006/main" xmlns:r="http://schemas.openxmlformats.org/officeDocument/2006/relationships" xmlns:p14="http://schemas.microsoft.com/office/powerpoint/2010/main" xmlns:p15="http://schemas.microsoft.com/office/powerpoint/2012/main" xmlns:mc="http://schemas.openxmlformats.org/markup-compatibility/2006">
   <p:cSld>
     <p:spTree>
@@ -12920,7 +13136,7 @@
 </p:sld>
 </file>
 
-<file path=ppt/slides/slide16.xml><?xml version="1.0" encoding="utf-8"?>
+<file path=ppt/slides/slide17.xml><?xml version="1.0" encoding="utf-8"?>
 <p:sld xmlns:a="http://schemas.openxmlformats.org/drawingml/2006/main" xmlns:p="http://schemas.openxmlformats.org/presentationml/2006/main" xmlns:r="http://schemas.openxmlformats.org/officeDocument/2006/relationships" xmlns:p14="http://schemas.microsoft.com/office/powerpoint/2010/main" xmlns:p15="http://schemas.microsoft.com/office/powerpoint/2012/main" xmlns:mc="http://schemas.openxmlformats.org/markup-compatibility/2006">
   <p:cSld>
     <p:spTree>
@@ -13003,7 +13219,7 @@
 </p:sld>
 </file>
 
-<file path=ppt/slides/slide17.xml><?xml version="1.0" encoding="utf-8"?>
+<file path=ppt/slides/slide18.xml><?xml version="1.0" encoding="utf-8"?>
 <p:sld xmlns:a="http://schemas.openxmlformats.org/drawingml/2006/main" xmlns:p="http://schemas.openxmlformats.org/presentationml/2006/main" xmlns:r="http://schemas.openxmlformats.org/officeDocument/2006/relationships" xmlns:p14="http://schemas.microsoft.com/office/powerpoint/2010/main" xmlns:p15="http://schemas.microsoft.com/office/powerpoint/2012/main" xmlns:mc="http://schemas.openxmlformats.org/markup-compatibility/2006">
   <p:cSld>
     <p:spTree>
@@ -13140,7 +13356,7 @@
 </p:sld>
 </file>
 
-<file path=ppt/slides/slide18.xml><?xml version="1.0" encoding="utf-8"?>
+<file path=ppt/slides/slide19.xml><?xml version="1.0" encoding="utf-8"?>
 <p:sld xmlns:a="http://schemas.openxmlformats.org/drawingml/2006/main" xmlns:p="http://schemas.openxmlformats.org/presentationml/2006/main" xmlns:r="http://schemas.openxmlformats.org/officeDocument/2006/relationships" xmlns:p14="http://schemas.microsoft.com/office/powerpoint/2010/main" xmlns:p15="http://schemas.microsoft.com/office/powerpoint/2012/main" xmlns:mc="http://schemas.openxmlformats.org/markup-compatibility/2006">
   <p:cSld>
     <p:spTree>
@@ -13233,1819 +13449,6 @@
           </a:ln>
         </p:spPr>
       </p:pic>
-    </p:spTree>
-  </p:cSld>
-  <mc:AlternateContent>
-    <mc:Choice Requires="p14">
-      <p:transition spd="slow" p14:dur="2000"/>
-    </mc:Choice>
-    <mc:Fallback>
-      <p:transition spd="slow"/>
-    </mc:Fallback>
-  </mc:AlternateContent>
-</p:sld>
-</file>
-
-<file path=ppt/slides/slide19.xml><?xml version="1.0" encoding="utf-8"?>
-<p:sld xmlns:a="http://schemas.openxmlformats.org/drawingml/2006/main" xmlns:p="http://schemas.openxmlformats.org/presentationml/2006/main" xmlns:r="http://schemas.openxmlformats.org/officeDocument/2006/relationships" xmlns:p14="http://schemas.microsoft.com/office/powerpoint/2010/main" xmlns:p15="http://schemas.microsoft.com/office/powerpoint/2012/main" xmlns:mc="http://schemas.openxmlformats.org/markup-compatibility/2006">
-  <p:cSld>
-    <p:spTree>
-      <p:nvGrpSpPr>
-        <p:cNvPr id="1" name=""/>
-        <p:cNvGrpSpPr/>
-        <p:nvPr/>
-      </p:nvGrpSpPr>
-      <p:grpSpPr>
-        <a:xfrm>
-          <a:off x="0" y="0"/>
-          <a:ext cx="0" cy="0"/>
-          <a:chOff x="0" y="0"/>
-          <a:chExt cx="0" cy="0"/>
-        </a:xfrm>
-      </p:grpSpPr>
-      <p:sp>
-        <p:nvSpPr>
-          <p:cNvPr id="97" name="PlaceHolder 1"/>
-          <p:cNvSpPr>
-            <a:spLocks noGrp="1"/>
-          </p:cNvSpPr>
-          <p:nvPr>
-            <p:ph type="title"/>
-          </p:nvPr>
-        </p:nvSpPr>
-        <p:spPr>
-          <a:xfrm>
-            <a:off x="311760" y="444960"/>
-            <a:ext cx="8520120" cy="572400"/>
-          </a:xfrm>
-          <a:prstGeom prst="rect">
-            <a:avLst/>
-          </a:prstGeom>
-          <a:noFill/>
-          <a:ln w="0">
-            <a:noFill/>
-          </a:ln>
-        </p:spPr>
-        <p:txBody>
-          <a:bodyPr lIns="91440" rIns="91440" tIns="91440" bIns="91440" anchor="t">
-            <a:noAutofit/>
-          </a:bodyPr>
-          <a:p>
-            <a:pPr indent="0">
-              <a:lnSpc>
-                <a:spcPct val="100000"/>
-              </a:lnSpc>
-              <a:buNone/>
-            </a:pPr>
-            <a:r>
-              <a:rPr b="0" lang="en-US" sz="2800" spc="-1" strike="noStrike">
-                <a:solidFill>
-                  <a:schemeClr val="dk1"/>
-                </a:solidFill>
-                <a:latin typeface="Arial"/>
-                <a:ea typeface="Arial"/>
-              </a:rPr>
-              <a:t>Nothing beats the constant</a:t>
-            </a:r>
-            <a:endParaRPr b="0" lang="en-US" sz="2800" spc="-1" strike="noStrike">
-              <a:solidFill>
-                <a:srgbClr val="000000"/>
-              </a:solidFill>
-              <a:latin typeface="Arial"/>
-            </a:endParaRPr>
-          </a:p>
-        </p:txBody>
-      </p:sp>
-      <p:graphicFrame>
-        <p:nvGraphicFramePr>
-          <p:cNvPr id="98" name="Table 2"/>
-          <p:cNvGraphicFramePr/>
-          <p:nvPr/>
-        </p:nvGraphicFramePr>
-        <p:xfrm>
-          <a:off x="685800" y="1143000"/>
-          <a:ext cx="7772040" cy="1920240"/>
-        </p:xfrm>
-        <a:graphic>
-          <a:graphicData uri="http://schemas.openxmlformats.org/drawingml/2006/table">
-            <a:tbl>
-              <a:tblPr/>
-              <a:tblGrid>
-                <a:gridCol w="548640"/>
-                <a:gridCol w="3657600"/>
-                <a:gridCol w="1828800"/>
-                <a:gridCol w="1737360"/>
-              </a:tblGrid>
-              <a:tr h="274320">
-                <a:tc>
-                  <a:txBody>
-                    <a:bodyPr anchor="t">
-                      <a:noAutofit/>
-                    </a:bodyPr>
-                    <a:p>
-                      <a:endParaRPr b="1" lang="en-US" sz="1200" spc="-1" strike="noStrike">
-                        <a:solidFill>
-                          <a:srgbClr val="ffffff"/>
-                        </a:solidFill>
-                        <a:latin typeface="Arial"/>
-                        <a:ea typeface="Arial"/>
-                      </a:endParaRPr>
-                    </a:p>
-                  </a:txBody>
-                  <a:tcPr anchor="t" marL="91440" marR="91440">
-                    <a:lnL w="12240">
-                      <a:solidFill>
-                        <a:srgbClr val="ffffff"/>
-                      </a:solidFill>
-                      <a:prstDash val="solid"/>
-                    </a:lnL>
-                    <a:lnR w="12240">
-                      <a:solidFill>
-                        <a:srgbClr val="ffffff"/>
-                      </a:solidFill>
-                      <a:prstDash val="solid"/>
-                    </a:lnR>
-                    <a:lnT w="12240">
-                      <a:solidFill>
-                        <a:srgbClr val="ffffff"/>
-                      </a:solidFill>
-                      <a:prstDash val="solid"/>
-                    </a:lnT>
-                    <a:lnB w="12240">
-                      <a:solidFill>
-                        <a:srgbClr val="ffffff"/>
-                      </a:solidFill>
-                      <a:prstDash val="solid"/>
-                    </a:lnB>
-                    <a:solidFill>
-                      <a:srgbClr val="4285f4"/>
-                    </a:solidFill>
-                  </a:tcPr>
-                </a:tc>
-                <a:tc>
-                  <a:txBody>
-                    <a:bodyPr anchor="t">
-                      <a:noAutofit/>
-                    </a:bodyPr>
-                    <a:p>
-                      <a:pPr>
-                        <a:lnSpc>
-                          <a:spcPct val="100000"/>
-                        </a:lnSpc>
-                      </a:pPr>
-                      <a:r>
-                        <a:rPr b="1" lang="en-US" sz="1200" spc="-1" strike="noStrike">
-                          <a:solidFill>
-                            <a:srgbClr val="ffffff"/>
-                          </a:solidFill>
-                          <a:latin typeface="Arial"/>
-                          <a:ea typeface="Arial"/>
-                        </a:rPr>
-                        <a:t>model</a:t>
-                      </a:r>
-                      <a:endParaRPr b="0" lang="en-US" sz="1200" spc="-1" strike="noStrike">
-                        <a:solidFill>
-                          <a:srgbClr val="ffffff"/>
-                        </a:solidFill>
-                        <a:latin typeface="Arial"/>
-                      </a:endParaRPr>
-                    </a:p>
-                  </a:txBody>
-                  <a:tcPr anchor="t" marL="91440" marR="91440">
-                    <a:lnL w="12240">
-                      <a:solidFill>
-                        <a:srgbClr val="ffffff"/>
-                      </a:solidFill>
-                      <a:prstDash val="solid"/>
-                    </a:lnL>
-                    <a:lnR w="12240">
-                      <a:solidFill>
-                        <a:srgbClr val="ffffff"/>
-                      </a:solidFill>
-                      <a:prstDash val="solid"/>
-                    </a:lnR>
-                    <a:lnT w="12240">
-                      <a:solidFill>
-                        <a:srgbClr val="ffffff"/>
-                      </a:solidFill>
-                      <a:prstDash val="solid"/>
-                    </a:lnT>
-                    <a:lnB w="12240">
-                      <a:solidFill>
-                        <a:srgbClr val="ffffff"/>
-                      </a:solidFill>
-                      <a:prstDash val="solid"/>
-                    </a:lnB>
-                    <a:solidFill>
-                      <a:srgbClr val="4285f4"/>
-                    </a:solidFill>
-                  </a:tcPr>
-                </a:tc>
-                <a:tc>
-                  <a:txBody>
-                    <a:bodyPr anchor="t">
-                      <a:noAutofit/>
-                    </a:bodyPr>
-                    <a:p>
-                      <a:pPr>
-                        <a:lnSpc>
-                          <a:spcPct val="100000"/>
-                        </a:lnSpc>
-                      </a:pPr>
-                      <a:r>
-                        <a:rPr b="1" lang="en-US" sz="1200" spc="-1" strike="noStrike">
-                          <a:solidFill>
-                            <a:srgbClr val="ffffff"/>
-                          </a:solidFill>
-                          <a:latin typeface="Arial"/>
-                          <a:ea typeface="Arial"/>
-                        </a:rPr>
-                        <a:t>test MAE</a:t>
-                      </a:r>
-                      <a:endParaRPr b="0" lang="en-US" sz="1200" spc="-1" strike="noStrike">
-                        <a:solidFill>
-                          <a:srgbClr val="ffffff"/>
-                        </a:solidFill>
-                        <a:latin typeface="Arial"/>
-                      </a:endParaRPr>
-                    </a:p>
-                  </a:txBody>
-                  <a:tcPr anchor="t" marL="91440" marR="91440">
-                    <a:lnL w="12240">
-                      <a:solidFill>
-                        <a:srgbClr val="ffffff"/>
-                      </a:solidFill>
-                      <a:prstDash val="solid"/>
-                    </a:lnL>
-                    <a:lnR w="12240">
-                      <a:solidFill>
-                        <a:srgbClr val="ffffff"/>
-                      </a:solidFill>
-                      <a:prstDash val="solid"/>
-                    </a:lnR>
-                    <a:lnT w="12240">
-                      <a:solidFill>
-                        <a:srgbClr val="ffffff"/>
-                      </a:solidFill>
-                      <a:prstDash val="solid"/>
-                    </a:lnT>
-                    <a:lnB w="12240">
-                      <a:solidFill>
-                        <a:srgbClr val="ffffff"/>
-                      </a:solidFill>
-                      <a:prstDash val="solid"/>
-                    </a:lnB>
-                    <a:solidFill>
-                      <a:srgbClr val="4285f4"/>
-                    </a:solidFill>
-                  </a:tcPr>
-                </a:tc>
-                <a:tc>
-                  <a:txBody>
-                    <a:bodyPr anchor="t">
-                      <a:noAutofit/>
-                    </a:bodyPr>
-                    <a:p>
-                      <a:pPr>
-                        <a:lnSpc>
-                          <a:spcPct val="100000"/>
-                        </a:lnSpc>
-                      </a:pPr>
-                      <a:r>
-                        <a:rPr b="1" lang="en-US" sz="1200" spc="-1" strike="noStrike">
-                          <a:solidFill>
-                            <a:srgbClr val="ffffff"/>
-                          </a:solidFill>
-                          <a:latin typeface="Arial"/>
-                          <a:ea typeface="Arial"/>
-                        </a:rPr>
-                        <a:t>R²</a:t>
-                      </a:r>
-                      <a:endParaRPr b="0" lang="en-US" sz="1200" spc="-1" strike="noStrike">
-                        <a:solidFill>
-                          <a:srgbClr val="ffffff"/>
-                        </a:solidFill>
-                        <a:latin typeface="Arial"/>
-                      </a:endParaRPr>
-                    </a:p>
-                  </a:txBody>
-                  <a:tcPr anchor="t" marL="91440" marR="91440">
-                    <a:lnL w="12240">
-                      <a:solidFill>
-                        <a:srgbClr val="ffffff"/>
-                      </a:solidFill>
-                      <a:prstDash val="solid"/>
-                    </a:lnL>
-                    <a:lnR w="12240">
-                      <a:solidFill>
-                        <a:srgbClr val="ffffff"/>
-                      </a:solidFill>
-                      <a:prstDash val="solid"/>
-                    </a:lnR>
-                    <a:lnT w="12240">
-                      <a:solidFill>
-                        <a:srgbClr val="ffffff"/>
-                      </a:solidFill>
-                      <a:prstDash val="solid"/>
-                    </a:lnT>
-                    <a:lnB w="12240">
-                      <a:solidFill>
-                        <a:srgbClr val="ffffff"/>
-                      </a:solidFill>
-                      <a:prstDash val="solid"/>
-                    </a:lnB>
-                    <a:solidFill>
-                      <a:srgbClr val="4285f4"/>
-                    </a:solidFill>
-                  </a:tcPr>
-                </a:tc>
-              </a:tr>
-              <a:tr h="274320">
-                <a:tc>
-                  <a:txBody>
-                    <a:bodyPr anchor="t">
-                      <a:noAutofit/>
-                    </a:bodyPr>
-                    <a:p>
-                      <a:pPr>
-                        <a:lnSpc>
-                          <a:spcPct val="100000"/>
-                        </a:lnSpc>
-                      </a:pPr>
-                      <a:r>
-                        <a:rPr b="0" lang="en-US" sz="1200" spc="-1" strike="noStrike">
-                          <a:solidFill>
-                            <a:srgbClr val="000000"/>
-                          </a:solidFill>
-                          <a:latin typeface="Arial"/>
-                          <a:ea typeface="Arial"/>
-                        </a:rPr>
-                        <a:t>—</a:t>
-                      </a:r>
-                      <a:endParaRPr b="0" lang="en-US" sz="1200" spc="-1" strike="noStrike">
-                        <a:solidFill>
-                          <a:srgbClr val="000000"/>
-                        </a:solidFill>
-                        <a:latin typeface="Arial"/>
-                      </a:endParaRPr>
-                    </a:p>
-                  </a:txBody>
-                  <a:tcPr anchor="t" marL="91440" marR="91440">
-                    <a:lnL w="12240">
-                      <a:solidFill>
-                        <a:srgbClr val="ffffff"/>
-                      </a:solidFill>
-                      <a:prstDash val="solid"/>
-                    </a:lnL>
-                    <a:lnR w="12240">
-                      <a:solidFill>
-                        <a:srgbClr val="ffffff"/>
-                      </a:solidFill>
-                      <a:prstDash val="solid"/>
-                    </a:lnR>
-                    <a:lnT w="12240">
-                      <a:solidFill>
-                        <a:srgbClr val="ffffff"/>
-                      </a:solidFill>
-                      <a:prstDash val="solid"/>
-                    </a:lnT>
-                    <a:lnB w="12240">
-                      <a:solidFill>
-                        <a:srgbClr val="ffffff"/>
-                      </a:solidFill>
-                      <a:prstDash val="solid"/>
-                    </a:lnB>
-                    <a:solidFill>
-                      <a:srgbClr val="ced8fa"/>
-                    </a:solidFill>
-                  </a:tcPr>
-                </a:tc>
-                <a:tc>
-                  <a:txBody>
-                    <a:bodyPr anchor="t">
-                      <a:noAutofit/>
-                    </a:bodyPr>
-                    <a:p>
-                      <a:pPr>
-                        <a:lnSpc>
-                          <a:spcPct val="100000"/>
-                        </a:lnSpc>
-                      </a:pPr>
-                      <a:r>
-                        <a:rPr b="0" lang="en-US" sz="1200" spc="-1" strike="noStrike">
-                          <a:solidFill>
-                            <a:srgbClr val="000000"/>
-                          </a:solidFill>
-                          <a:latin typeface="Arial"/>
-                          <a:ea typeface="Arial"/>
-                        </a:rPr>
-                        <a:t>constant (predict the mean)</a:t>
-                      </a:r>
-                      <a:endParaRPr b="0" lang="en-US" sz="1200" spc="-1" strike="noStrike">
-                        <a:solidFill>
-                          <a:srgbClr val="000000"/>
-                        </a:solidFill>
-                        <a:latin typeface="Arial"/>
-                      </a:endParaRPr>
-                    </a:p>
-                  </a:txBody>
-                  <a:tcPr anchor="t" marL="91440" marR="91440">
-                    <a:lnL w="12240">
-                      <a:solidFill>
-                        <a:srgbClr val="ffffff"/>
-                      </a:solidFill>
-                      <a:prstDash val="solid"/>
-                    </a:lnL>
-                    <a:lnR w="12240">
-                      <a:solidFill>
-                        <a:srgbClr val="ffffff"/>
-                      </a:solidFill>
-                      <a:prstDash val="solid"/>
-                    </a:lnR>
-                    <a:lnT w="12240">
-                      <a:solidFill>
-                        <a:srgbClr val="ffffff"/>
-                      </a:solidFill>
-                      <a:prstDash val="solid"/>
-                    </a:lnT>
-                    <a:lnB w="12240">
-                      <a:solidFill>
-                        <a:srgbClr val="ffffff"/>
-                      </a:solidFill>
-                      <a:prstDash val="solid"/>
-                    </a:lnB>
-                    <a:solidFill>
-                      <a:srgbClr val="ced8fa"/>
-                    </a:solidFill>
-                  </a:tcPr>
-                </a:tc>
-                <a:tc>
-                  <a:txBody>
-                    <a:bodyPr anchor="t">
-                      <a:noAutofit/>
-                    </a:bodyPr>
-                    <a:p>
-                      <a:pPr>
-                        <a:lnSpc>
-                          <a:spcPct val="100000"/>
-                        </a:lnSpc>
-                      </a:pPr>
-                      <a:r>
-                        <a:rPr b="0" lang="en-US" sz="1200" spc="-1" strike="noStrike">
-                          <a:solidFill>
-                            <a:srgbClr val="000000"/>
-                          </a:solidFill>
-                          <a:latin typeface="Arial"/>
-                          <a:ea typeface="Arial"/>
-                        </a:rPr>
-                        <a:t>74.1 bps</a:t>
-                      </a:r>
-                      <a:endParaRPr b="0" lang="en-US" sz="1200" spc="-1" strike="noStrike">
-                        <a:solidFill>
-                          <a:srgbClr val="000000"/>
-                        </a:solidFill>
-                        <a:latin typeface="Arial"/>
-                      </a:endParaRPr>
-                    </a:p>
-                  </a:txBody>
-                  <a:tcPr anchor="t" marL="91440" marR="91440">
-                    <a:lnL w="12240">
-                      <a:solidFill>
-                        <a:srgbClr val="ffffff"/>
-                      </a:solidFill>
-                      <a:prstDash val="solid"/>
-                    </a:lnL>
-                    <a:lnR w="12240">
-                      <a:solidFill>
-                        <a:srgbClr val="ffffff"/>
-                      </a:solidFill>
-                      <a:prstDash val="solid"/>
-                    </a:lnR>
-                    <a:lnT w="12240">
-                      <a:solidFill>
-                        <a:srgbClr val="ffffff"/>
-                      </a:solidFill>
-                      <a:prstDash val="solid"/>
-                    </a:lnT>
-                    <a:lnB w="12240">
-                      <a:solidFill>
-                        <a:srgbClr val="ffffff"/>
-                      </a:solidFill>
-                      <a:prstDash val="solid"/>
-                    </a:lnB>
-                    <a:solidFill>
-                      <a:srgbClr val="ced8fa"/>
-                    </a:solidFill>
-                  </a:tcPr>
-                </a:tc>
-                <a:tc>
-                  <a:txBody>
-                    <a:bodyPr anchor="t">
-                      <a:noAutofit/>
-                    </a:bodyPr>
-                    <a:p>
-                      <a:pPr>
-                        <a:lnSpc>
-                          <a:spcPct val="100000"/>
-                        </a:lnSpc>
-                      </a:pPr>
-                      <a:r>
-                        <a:rPr b="0" lang="en-US" sz="1200" spc="-1" strike="noStrike">
-                          <a:solidFill>
-                            <a:srgbClr val="000000"/>
-                          </a:solidFill>
-                          <a:latin typeface="Arial"/>
-                          <a:ea typeface="Arial"/>
-                        </a:rPr>
-                        <a:t>0.0000</a:t>
-                      </a:r>
-                      <a:endParaRPr b="0" lang="en-US" sz="1200" spc="-1" strike="noStrike">
-                        <a:solidFill>
-                          <a:srgbClr val="000000"/>
-                        </a:solidFill>
-                        <a:latin typeface="Arial"/>
-                      </a:endParaRPr>
-                    </a:p>
-                  </a:txBody>
-                  <a:tcPr anchor="t" marL="91440" marR="91440">
-                    <a:lnL w="12240">
-                      <a:solidFill>
-                        <a:srgbClr val="ffffff"/>
-                      </a:solidFill>
-                      <a:prstDash val="solid"/>
-                    </a:lnL>
-                    <a:lnR w="12240">
-                      <a:solidFill>
-                        <a:srgbClr val="ffffff"/>
-                      </a:solidFill>
-                      <a:prstDash val="solid"/>
-                    </a:lnR>
-                    <a:lnT w="12240">
-                      <a:solidFill>
-                        <a:srgbClr val="ffffff"/>
-                      </a:solidFill>
-                      <a:prstDash val="solid"/>
-                    </a:lnT>
-                    <a:lnB w="12240">
-                      <a:solidFill>
-                        <a:srgbClr val="ffffff"/>
-                      </a:solidFill>
-                      <a:prstDash val="solid"/>
-                    </a:lnB>
-                    <a:solidFill>
-                      <a:srgbClr val="ced8fa"/>
-                    </a:solidFill>
-                  </a:tcPr>
-                </a:tc>
-              </a:tr>
-              <a:tr h="274320">
-                <a:tc>
-                  <a:txBody>
-                    <a:bodyPr anchor="t">
-                      <a:noAutofit/>
-                    </a:bodyPr>
-                    <a:p>
-                      <a:pPr>
-                        <a:lnSpc>
-                          <a:spcPct val="100000"/>
-                        </a:lnSpc>
-                      </a:pPr>
-                      <a:r>
-                        <a:rPr b="0" lang="en-US" sz="1200" spc="-1" strike="noStrike">
-                          <a:solidFill>
-                            <a:srgbClr val="000000"/>
-                          </a:solidFill>
-                          <a:latin typeface="Arial"/>
-                          <a:ea typeface="Arial"/>
-                        </a:rPr>
-                        <a:t>2a</a:t>
-                      </a:r>
-                      <a:endParaRPr b="0" lang="en-US" sz="1200" spc="-1" strike="noStrike">
-                        <a:solidFill>
-                          <a:srgbClr val="000000"/>
-                        </a:solidFill>
-                        <a:latin typeface="Arial"/>
-                      </a:endParaRPr>
-                    </a:p>
-                  </a:txBody>
-                  <a:tcPr anchor="t" marL="91440" marR="91440">
-                    <a:lnL w="12240">
-                      <a:solidFill>
-                        <a:srgbClr val="ffffff"/>
-                      </a:solidFill>
-                      <a:prstDash val="solid"/>
-                    </a:lnL>
-                    <a:lnR w="12240">
-                      <a:solidFill>
-                        <a:srgbClr val="ffffff"/>
-                      </a:solidFill>
-                      <a:prstDash val="solid"/>
-                    </a:lnR>
-                    <a:lnT w="12240">
-                      <a:solidFill>
-                        <a:srgbClr val="ffffff"/>
-                      </a:solidFill>
-                      <a:prstDash val="solid"/>
-                    </a:lnT>
-                    <a:lnB w="12240">
-                      <a:solidFill>
-                        <a:srgbClr val="ffffff"/>
-                      </a:solidFill>
-                      <a:prstDash val="solid"/>
-                    </a:lnB>
-                    <a:solidFill>
-                      <a:srgbClr val="e8ecfc"/>
-                    </a:solidFill>
-                  </a:tcPr>
-                </a:tc>
-                <a:tc>
-                  <a:txBody>
-                    <a:bodyPr anchor="t">
-                      <a:noAutofit/>
-                    </a:bodyPr>
-                    <a:p>
-                      <a:pPr>
-                        <a:lnSpc>
-                          <a:spcPct val="100000"/>
-                        </a:lnSpc>
-                      </a:pPr>
-                      <a:r>
-                        <a:rPr b="0" lang="en-US" sz="1200" spc="-1" strike="noStrike">
-                          <a:solidFill>
-                            <a:srgbClr val="000000"/>
-                          </a:solidFill>
-                          <a:latin typeface="Arial"/>
-                          <a:ea typeface="Arial"/>
-                        </a:rPr>
-                        <a:t>Encoder + NN (separate)</a:t>
-                      </a:r>
-                      <a:endParaRPr b="0" lang="en-US" sz="1200" spc="-1" strike="noStrike">
-                        <a:solidFill>
-                          <a:srgbClr val="000000"/>
-                        </a:solidFill>
-                        <a:latin typeface="Arial"/>
-                      </a:endParaRPr>
-                    </a:p>
-                  </a:txBody>
-                  <a:tcPr anchor="t" marL="91440" marR="91440">
-                    <a:lnL w="12240">
-                      <a:solidFill>
-                        <a:srgbClr val="ffffff"/>
-                      </a:solidFill>
-                      <a:prstDash val="solid"/>
-                    </a:lnL>
-                    <a:lnR w="12240">
-                      <a:solidFill>
-                        <a:srgbClr val="ffffff"/>
-                      </a:solidFill>
-                      <a:prstDash val="solid"/>
-                    </a:lnR>
-                    <a:lnT w="12240">
-                      <a:solidFill>
-                        <a:srgbClr val="ffffff"/>
-                      </a:solidFill>
-                      <a:prstDash val="solid"/>
-                    </a:lnT>
-                    <a:lnB w="12240">
-                      <a:solidFill>
-                        <a:srgbClr val="ffffff"/>
-                      </a:solidFill>
-                      <a:prstDash val="solid"/>
-                    </a:lnB>
-                    <a:solidFill>
-                      <a:srgbClr val="e8ecfc"/>
-                    </a:solidFill>
-                  </a:tcPr>
-                </a:tc>
-                <a:tc>
-                  <a:txBody>
-                    <a:bodyPr anchor="t">
-                      <a:noAutofit/>
-                    </a:bodyPr>
-                    <a:p>
-                      <a:pPr>
-                        <a:lnSpc>
-                          <a:spcPct val="100000"/>
-                        </a:lnSpc>
-                      </a:pPr>
-                      <a:r>
-                        <a:rPr b="0" lang="en-US" sz="1200" spc="-1" strike="noStrike">
-                          <a:solidFill>
-                            <a:srgbClr val="000000"/>
-                          </a:solidFill>
-                          <a:latin typeface="Arial"/>
-                          <a:ea typeface="Arial"/>
-                        </a:rPr>
-                        <a:t>78.5 bps</a:t>
-                      </a:r>
-                      <a:endParaRPr b="0" lang="en-US" sz="1200" spc="-1" strike="noStrike">
-                        <a:solidFill>
-                          <a:srgbClr val="000000"/>
-                        </a:solidFill>
-                        <a:latin typeface="Arial"/>
-                      </a:endParaRPr>
-                    </a:p>
-                  </a:txBody>
-                  <a:tcPr anchor="t" marL="91440" marR="91440">
-                    <a:lnL w="12240">
-                      <a:solidFill>
-                        <a:srgbClr val="ffffff"/>
-                      </a:solidFill>
-                      <a:prstDash val="solid"/>
-                    </a:lnL>
-                    <a:lnR w="12240">
-                      <a:solidFill>
-                        <a:srgbClr val="ffffff"/>
-                      </a:solidFill>
-                      <a:prstDash val="solid"/>
-                    </a:lnR>
-                    <a:lnT w="12240">
-                      <a:solidFill>
-                        <a:srgbClr val="ffffff"/>
-                      </a:solidFill>
-                      <a:prstDash val="solid"/>
-                    </a:lnT>
-                    <a:lnB w="12240">
-                      <a:solidFill>
-                        <a:srgbClr val="ffffff"/>
-                      </a:solidFill>
-                      <a:prstDash val="solid"/>
-                    </a:lnB>
-                    <a:solidFill>
-                      <a:srgbClr val="e8ecfc"/>
-                    </a:solidFill>
-                  </a:tcPr>
-                </a:tc>
-                <a:tc>
-                  <a:txBody>
-                    <a:bodyPr anchor="t">
-                      <a:noAutofit/>
-                    </a:bodyPr>
-                    <a:p>
-                      <a:pPr>
-                        <a:lnSpc>
-                          <a:spcPct val="100000"/>
-                        </a:lnSpc>
-                      </a:pPr>
-                      <a:r>
-                        <a:rPr b="0" lang="en-US" sz="1200" spc="-1" strike="noStrike">
-                          <a:solidFill>
-                            <a:srgbClr val="c0392b"/>
-                          </a:solidFill>
-                          <a:latin typeface="Arial"/>
-                          <a:ea typeface="Arial"/>
-                        </a:rPr>
-                        <a:t>-0.0529</a:t>
-                      </a:r>
-                      <a:endParaRPr b="0" lang="en-US" sz="1200" spc="-1" strike="noStrike">
-                        <a:solidFill>
-                          <a:srgbClr val="000000"/>
-                        </a:solidFill>
-                        <a:latin typeface="Arial"/>
-                      </a:endParaRPr>
-                    </a:p>
-                  </a:txBody>
-                  <a:tcPr anchor="t" marL="91440" marR="91440">
-                    <a:lnL w="12240">
-                      <a:solidFill>
-                        <a:srgbClr val="ffffff"/>
-                      </a:solidFill>
-                      <a:prstDash val="solid"/>
-                    </a:lnL>
-                    <a:lnR w="12240">
-                      <a:solidFill>
-                        <a:srgbClr val="ffffff"/>
-                      </a:solidFill>
-                      <a:prstDash val="solid"/>
-                    </a:lnR>
-                    <a:lnT w="12240">
-                      <a:solidFill>
-                        <a:srgbClr val="ffffff"/>
-                      </a:solidFill>
-                      <a:prstDash val="solid"/>
-                    </a:lnT>
-                    <a:lnB w="12240">
-                      <a:solidFill>
-                        <a:srgbClr val="ffffff"/>
-                      </a:solidFill>
-                      <a:prstDash val="solid"/>
-                    </a:lnB>
-                    <a:solidFill>
-                      <a:srgbClr val="e8ecfc"/>
-                    </a:solidFill>
-                  </a:tcPr>
-                </a:tc>
-              </a:tr>
-              <a:tr h="274320">
-                <a:tc>
-                  <a:txBody>
-                    <a:bodyPr anchor="t">
-                      <a:noAutofit/>
-                    </a:bodyPr>
-                    <a:p>
-                      <a:pPr>
-                        <a:lnSpc>
-                          <a:spcPct val="100000"/>
-                        </a:lnSpc>
-                      </a:pPr>
-                      <a:r>
-                        <a:rPr b="0" lang="en-US" sz="1200" spc="-1" strike="noStrike">
-                          <a:solidFill>
-                            <a:srgbClr val="000000"/>
-                          </a:solidFill>
-                          <a:latin typeface="Arial"/>
-                          <a:ea typeface="Arial"/>
-                        </a:rPr>
-                        <a:t>2b</a:t>
-                      </a:r>
-                      <a:endParaRPr b="0" lang="en-US" sz="1200" spc="-1" strike="noStrike">
-                        <a:solidFill>
-                          <a:srgbClr val="000000"/>
-                        </a:solidFill>
-                        <a:latin typeface="Arial"/>
-                      </a:endParaRPr>
-                    </a:p>
-                  </a:txBody>
-                  <a:tcPr anchor="t" marL="91440" marR="91440">
-                    <a:lnL w="12240">
-                      <a:solidFill>
-                        <a:srgbClr val="ffffff"/>
-                      </a:solidFill>
-                      <a:prstDash val="solid"/>
-                    </a:lnL>
-                    <a:lnR w="12240">
-                      <a:solidFill>
-                        <a:srgbClr val="ffffff"/>
-                      </a:solidFill>
-                      <a:prstDash val="solid"/>
-                    </a:lnR>
-                    <a:lnT w="12240">
-                      <a:solidFill>
-                        <a:srgbClr val="ffffff"/>
-                      </a:solidFill>
-                      <a:prstDash val="solid"/>
-                    </a:lnT>
-                    <a:lnB w="12240">
-                      <a:solidFill>
-                        <a:srgbClr val="ffffff"/>
-                      </a:solidFill>
-                      <a:prstDash val="solid"/>
-                    </a:lnB>
-                    <a:solidFill>
-                      <a:srgbClr val="ced8fa"/>
-                    </a:solidFill>
-                  </a:tcPr>
-                </a:tc>
-                <a:tc>
-                  <a:txBody>
-                    <a:bodyPr anchor="t">
-                      <a:noAutofit/>
-                    </a:bodyPr>
-                    <a:p>
-                      <a:pPr>
-                        <a:lnSpc>
-                          <a:spcPct val="100000"/>
-                        </a:lnSpc>
-                      </a:pPr>
-                      <a:r>
-                        <a:rPr b="0" lang="en-US" sz="1200" spc="-1" strike="noStrike">
-                          <a:solidFill>
-                            <a:srgbClr val="000000"/>
-                          </a:solidFill>
-                          <a:latin typeface="Arial"/>
-                          <a:ea typeface="Arial"/>
-                        </a:rPr>
-                        <a:t>Encoder + NN (combined)</a:t>
-                      </a:r>
-                      <a:endParaRPr b="0" lang="en-US" sz="1200" spc="-1" strike="noStrike">
-                        <a:solidFill>
-                          <a:srgbClr val="000000"/>
-                        </a:solidFill>
-                        <a:latin typeface="Arial"/>
-                      </a:endParaRPr>
-                    </a:p>
-                  </a:txBody>
-                  <a:tcPr anchor="t" marL="91440" marR="91440">
-                    <a:lnL w="12240">
-                      <a:solidFill>
-                        <a:srgbClr val="ffffff"/>
-                      </a:solidFill>
-                      <a:prstDash val="solid"/>
-                    </a:lnL>
-                    <a:lnR w="12240">
-                      <a:solidFill>
-                        <a:srgbClr val="ffffff"/>
-                      </a:solidFill>
-                      <a:prstDash val="solid"/>
-                    </a:lnR>
-                    <a:lnT w="12240">
-                      <a:solidFill>
-                        <a:srgbClr val="ffffff"/>
-                      </a:solidFill>
-                      <a:prstDash val="solid"/>
-                    </a:lnT>
-                    <a:lnB w="12240">
-                      <a:solidFill>
-                        <a:srgbClr val="ffffff"/>
-                      </a:solidFill>
-                      <a:prstDash val="solid"/>
-                    </a:lnB>
-                    <a:solidFill>
-                      <a:srgbClr val="ced8fa"/>
-                    </a:solidFill>
-                  </a:tcPr>
-                </a:tc>
-                <a:tc>
-                  <a:txBody>
-                    <a:bodyPr anchor="t">
-                      <a:noAutofit/>
-                    </a:bodyPr>
-                    <a:p>
-                      <a:pPr>
-                        <a:lnSpc>
-                          <a:spcPct val="100000"/>
-                        </a:lnSpc>
-                      </a:pPr>
-                      <a:r>
-                        <a:rPr b="0" lang="en-US" sz="1200" spc="-1" strike="noStrike">
-                          <a:solidFill>
-                            <a:srgbClr val="000000"/>
-                          </a:solidFill>
-                          <a:latin typeface="Arial"/>
-                          <a:ea typeface="Arial"/>
-                        </a:rPr>
-                        <a:t>75.1 bps</a:t>
-                      </a:r>
-                      <a:endParaRPr b="0" lang="en-US" sz="1200" spc="-1" strike="noStrike">
-                        <a:solidFill>
-                          <a:srgbClr val="000000"/>
-                        </a:solidFill>
-                        <a:latin typeface="Arial"/>
-                      </a:endParaRPr>
-                    </a:p>
-                  </a:txBody>
-                  <a:tcPr anchor="t" marL="91440" marR="91440">
-                    <a:lnL w="12240">
-                      <a:solidFill>
-                        <a:srgbClr val="ffffff"/>
-                      </a:solidFill>
-                      <a:prstDash val="solid"/>
-                    </a:lnL>
-                    <a:lnR w="12240">
-                      <a:solidFill>
-                        <a:srgbClr val="ffffff"/>
-                      </a:solidFill>
-                      <a:prstDash val="solid"/>
-                    </a:lnR>
-                    <a:lnT w="12240">
-                      <a:solidFill>
-                        <a:srgbClr val="ffffff"/>
-                      </a:solidFill>
-                      <a:prstDash val="solid"/>
-                    </a:lnT>
-                    <a:lnB w="12240">
-                      <a:solidFill>
-                        <a:srgbClr val="ffffff"/>
-                      </a:solidFill>
-                      <a:prstDash val="solid"/>
-                    </a:lnB>
-                    <a:solidFill>
-                      <a:srgbClr val="ced8fa"/>
-                    </a:solidFill>
-                  </a:tcPr>
-                </a:tc>
-                <a:tc>
-                  <a:txBody>
-                    <a:bodyPr anchor="t">
-                      <a:noAutofit/>
-                    </a:bodyPr>
-                    <a:p>
-                      <a:pPr>
-                        <a:lnSpc>
-                          <a:spcPct val="100000"/>
-                        </a:lnSpc>
-                      </a:pPr>
-                      <a:r>
-                        <a:rPr b="0" lang="en-US" sz="1200" spc="-1" strike="noStrike">
-                          <a:solidFill>
-                            <a:srgbClr val="c0392b"/>
-                          </a:solidFill>
-                          <a:latin typeface="Arial"/>
-                          <a:ea typeface="Arial"/>
-                        </a:rPr>
-                        <a:t>-0.0049</a:t>
-                      </a:r>
-                      <a:endParaRPr b="0" lang="en-US" sz="1200" spc="-1" strike="noStrike">
-                        <a:solidFill>
-                          <a:srgbClr val="000000"/>
-                        </a:solidFill>
-                        <a:latin typeface="Arial"/>
-                      </a:endParaRPr>
-                    </a:p>
-                  </a:txBody>
-                  <a:tcPr anchor="t" marL="91440" marR="91440">
-                    <a:lnL w="12240">
-                      <a:solidFill>
-                        <a:srgbClr val="ffffff"/>
-                      </a:solidFill>
-                      <a:prstDash val="solid"/>
-                    </a:lnL>
-                    <a:lnR w="12240">
-                      <a:solidFill>
-                        <a:srgbClr val="ffffff"/>
-                      </a:solidFill>
-                      <a:prstDash val="solid"/>
-                    </a:lnR>
-                    <a:lnT w="12240">
-                      <a:solidFill>
-                        <a:srgbClr val="ffffff"/>
-                      </a:solidFill>
-                      <a:prstDash val="solid"/>
-                    </a:lnT>
-                    <a:lnB w="12240">
-                      <a:solidFill>
-                        <a:srgbClr val="ffffff"/>
-                      </a:solidFill>
-                      <a:prstDash val="solid"/>
-                    </a:lnB>
-                    <a:solidFill>
-                      <a:srgbClr val="ced8fa"/>
-                    </a:solidFill>
-                  </a:tcPr>
-                </a:tc>
-              </a:tr>
-              <a:tr h="274320">
-                <a:tc>
-                  <a:txBody>
-                    <a:bodyPr anchor="t">
-                      <a:noAutofit/>
-                    </a:bodyPr>
-                    <a:p>
-                      <a:pPr>
-                        <a:lnSpc>
-                          <a:spcPct val="100000"/>
-                        </a:lnSpc>
-                      </a:pPr>
-                      <a:r>
-                        <a:rPr b="0" lang="en-US" sz="1200" spc="-1" strike="noStrike">
-                          <a:solidFill>
-                            <a:srgbClr val="000000"/>
-                          </a:solidFill>
-                          <a:latin typeface="Arial"/>
-                          <a:ea typeface="Arial"/>
-                        </a:rPr>
-                        <a:t>2c</a:t>
-                      </a:r>
-                      <a:endParaRPr b="0" lang="en-US" sz="1200" spc="-1" strike="noStrike">
-                        <a:solidFill>
-                          <a:srgbClr val="000000"/>
-                        </a:solidFill>
-                        <a:latin typeface="Arial"/>
-                      </a:endParaRPr>
-                    </a:p>
-                  </a:txBody>
-                  <a:tcPr anchor="t" marL="91440" marR="91440">
-                    <a:lnL w="12240">
-                      <a:solidFill>
-                        <a:srgbClr val="ffffff"/>
-                      </a:solidFill>
-                      <a:prstDash val="solid"/>
-                    </a:lnL>
-                    <a:lnR w="12240">
-                      <a:solidFill>
-                        <a:srgbClr val="ffffff"/>
-                      </a:solidFill>
-                      <a:prstDash val="solid"/>
-                    </a:lnR>
-                    <a:lnT w="12240">
-                      <a:solidFill>
-                        <a:srgbClr val="ffffff"/>
-                      </a:solidFill>
-                      <a:prstDash val="solid"/>
-                    </a:lnT>
-                    <a:lnB w="12240">
-                      <a:solidFill>
-                        <a:srgbClr val="ffffff"/>
-                      </a:solidFill>
-                      <a:prstDash val="solid"/>
-                    </a:lnB>
-                    <a:solidFill>
-                      <a:srgbClr val="e8ecfc"/>
-                    </a:solidFill>
-                  </a:tcPr>
-                </a:tc>
-                <a:tc>
-                  <a:txBody>
-                    <a:bodyPr anchor="t">
-                      <a:noAutofit/>
-                    </a:bodyPr>
-                    <a:p>
-                      <a:pPr>
-                        <a:lnSpc>
-                          <a:spcPct val="100000"/>
-                        </a:lnSpc>
-                      </a:pPr>
-                      <a:r>
-                        <a:rPr b="0" lang="en-US" sz="1200" spc="-1" strike="noStrike">
-                          <a:solidFill>
-                            <a:srgbClr val="000000"/>
-                          </a:solidFill>
-                          <a:latin typeface="Arial"/>
-                          <a:ea typeface="Arial"/>
-                        </a:rPr>
-                        <a:t>Fine-tuned LLM (LoRA)</a:t>
-                      </a:r>
-                      <a:endParaRPr b="0" lang="en-US" sz="1200" spc="-1" strike="noStrike">
-                        <a:solidFill>
-                          <a:srgbClr val="000000"/>
-                        </a:solidFill>
-                        <a:latin typeface="Arial"/>
-                      </a:endParaRPr>
-                    </a:p>
-                  </a:txBody>
-                  <a:tcPr anchor="t" marL="91440" marR="91440">
-                    <a:lnL w="12240">
-                      <a:solidFill>
-                        <a:srgbClr val="ffffff"/>
-                      </a:solidFill>
-                      <a:prstDash val="solid"/>
-                    </a:lnL>
-                    <a:lnR w="12240">
-                      <a:solidFill>
-                        <a:srgbClr val="ffffff"/>
-                      </a:solidFill>
-                      <a:prstDash val="solid"/>
-                    </a:lnR>
-                    <a:lnT w="12240">
-                      <a:solidFill>
-                        <a:srgbClr val="ffffff"/>
-                      </a:solidFill>
-                      <a:prstDash val="solid"/>
-                    </a:lnT>
-                    <a:lnB w="12240">
-                      <a:solidFill>
-                        <a:srgbClr val="ffffff"/>
-                      </a:solidFill>
-                      <a:prstDash val="solid"/>
-                    </a:lnB>
-                    <a:solidFill>
-                      <a:srgbClr val="e8ecfc"/>
-                    </a:solidFill>
-                  </a:tcPr>
-                </a:tc>
-                <a:tc>
-                  <a:txBody>
-                    <a:bodyPr anchor="t">
-                      <a:noAutofit/>
-                    </a:bodyPr>
-                    <a:p>
-                      <a:pPr>
-                        <a:lnSpc>
-                          <a:spcPct val="100000"/>
-                        </a:lnSpc>
-                      </a:pPr>
-                      <a:r>
-                        <a:rPr b="0" lang="en-US" sz="1200" spc="-1" strike="noStrike">
-                          <a:solidFill>
-                            <a:srgbClr val="000000"/>
-                          </a:solidFill>
-                          <a:latin typeface="Arial"/>
-                          <a:ea typeface="Arial"/>
-                        </a:rPr>
-                        <a:t>274.1 bps</a:t>
-                      </a:r>
-                      <a:endParaRPr b="0" lang="en-US" sz="1200" spc="-1" strike="noStrike">
-                        <a:solidFill>
-                          <a:srgbClr val="000000"/>
-                        </a:solidFill>
-                        <a:latin typeface="Arial"/>
-                      </a:endParaRPr>
-                    </a:p>
-                  </a:txBody>
-                  <a:tcPr anchor="t" marL="91440" marR="91440">
-                    <a:lnL w="12240">
-                      <a:solidFill>
-                        <a:srgbClr val="ffffff"/>
-                      </a:solidFill>
-                      <a:prstDash val="solid"/>
-                    </a:lnL>
-                    <a:lnR w="12240">
-                      <a:solidFill>
-                        <a:srgbClr val="ffffff"/>
-                      </a:solidFill>
-                      <a:prstDash val="solid"/>
-                    </a:lnR>
-                    <a:lnT w="12240">
-                      <a:solidFill>
-                        <a:srgbClr val="ffffff"/>
-                      </a:solidFill>
-                      <a:prstDash val="solid"/>
-                    </a:lnT>
-                    <a:lnB w="12240">
-                      <a:solidFill>
-                        <a:srgbClr val="ffffff"/>
-                      </a:solidFill>
-                      <a:prstDash val="solid"/>
-                    </a:lnB>
-                    <a:solidFill>
-                      <a:srgbClr val="e8ecfc"/>
-                    </a:solidFill>
-                  </a:tcPr>
-                </a:tc>
-                <a:tc>
-                  <a:txBody>
-                    <a:bodyPr anchor="t">
-                      <a:noAutofit/>
-                    </a:bodyPr>
-                    <a:p>
-                      <a:pPr>
-                        <a:lnSpc>
-                          <a:spcPct val="100000"/>
-                        </a:lnSpc>
-                      </a:pPr>
-                      <a:r>
-                        <a:rPr b="0" lang="en-US" sz="1200" spc="-1" strike="noStrike">
-                          <a:solidFill>
-                            <a:srgbClr val="c0392b"/>
-                          </a:solidFill>
-                          <a:latin typeface="Arial"/>
-                          <a:ea typeface="Arial"/>
-                        </a:rPr>
-                        <a:t>-14.44 ※</a:t>
-                      </a:r>
-                      <a:endParaRPr b="0" lang="en-US" sz="1200" spc="-1" strike="noStrike">
-                        <a:solidFill>
-                          <a:srgbClr val="000000"/>
-                        </a:solidFill>
-                        <a:latin typeface="Arial"/>
-                      </a:endParaRPr>
-                    </a:p>
-                  </a:txBody>
-                  <a:tcPr anchor="t" marL="91440" marR="91440">
-                    <a:lnL w="12240">
-                      <a:solidFill>
-                        <a:srgbClr val="ffffff"/>
-                      </a:solidFill>
-                      <a:prstDash val="solid"/>
-                    </a:lnL>
-                    <a:lnR w="12240">
-                      <a:solidFill>
-                        <a:srgbClr val="ffffff"/>
-                      </a:solidFill>
-                      <a:prstDash val="solid"/>
-                    </a:lnR>
-                    <a:lnT w="12240">
-                      <a:solidFill>
-                        <a:srgbClr val="ffffff"/>
-                      </a:solidFill>
-                      <a:prstDash val="solid"/>
-                    </a:lnT>
-                    <a:lnB w="12240">
-                      <a:solidFill>
-                        <a:srgbClr val="ffffff"/>
-                      </a:solidFill>
-                      <a:prstDash val="solid"/>
-                    </a:lnB>
-                    <a:solidFill>
-                      <a:srgbClr val="e8ecfc"/>
-                    </a:solidFill>
-                  </a:tcPr>
-                </a:tc>
-              </a:tr>
-              <a:tr h="274320">
-                <a:tc>
-                  <a:txBody>
-                    <a:bodyPr anchor="t">
-                      <a:noAutofit/>
-                    </a:bodyPr>
-                    <a:p>
-                      <a:pPr>
-                        <a:lnSpc>
-                          <a:spcPct val="100000"/>
-                        </a:lnSpc>
-                      </a:pPr>
-                      <a:r>
-                        <a:rPr b="0" lang="en-US" sz="1200" spc="-1" strike="noStrike">
-                          <a:solidFill>
-                            <a:srgbClr val="000000"/>
-                          </a:solidFill>
-                          <a:latin typeface="Arial"/>
-                          <a:ea typeface="Arial"/>
-                        </a:rPr>
-                        <a:t>2d</a:t>
-                      </a:r>
-                      <a:endParaRPr b="0" lang="en-US" sz="1200" spc="-1" strike="noStrike">
-                        <a:solidFill>
-                          <a:srgbClr val="000000"/>
-                        </a:solidFill>
-                        <a:latin typeface="Arial"/>
-                      </a:endParaRPr>
-                    </a:p>
-                  </a:txBody>
-                  <a:tcPr anchor="t" marL="91440" marR="91440">
-                    <a:lnL w="12240">
-                      <a:solidFill>
-                        <a:srgbClr val="ffffff"/>
-                      </a:solidFill>
-                      <a:prstDash val="solid"/>
-                    </a:lnL>
-                    <a:lnR w="12240">
-                      <a:solidFill>
-                        <a:srgbClr val="ffffff"/>
-                      </a:solidFill>
-                      <a:prstDash val="solid"/>
-                    </a:lnR>
-                    <a:lnT w="12240">
-                      <a:solidFill>
-                        <a:srgbClr val="ffffff"/>
-                      </a:solidFill>
-                      <a:prstDash val="solid"/>
-                    </a:lnT>
-                    <a:lnB w="12240">
-                      <a:solidFill>
-                        <a:srgbClr val="ffffff"/>
-                      </a:solidFill>
-                      <a:prstDash val="solid"/>
-                    </a:lnB>
-                    <a:solidFill>
-                      <a:srgbClr val="ced8fa"/>
-                    </a:solidFill>
-                  </a:tcPr>
-                </a:tc>
-                <a:tc>
-                  <a:txBody>
-                    <a:bodyPr anchor="t">
-                      <a:noAutofit/>
-                    </a:bodyPr>
-                    <a:p>
-                      <a:pPr>
-                        <a:lnSpc>
-                          <a:spcPct val="100000"/>
-                        </a:lnSpc>
-                      </a:pPr>
-                      <a:r>
-                        <a:rPr b="0" lang="en-US" sz="1200" spc="-1" strike="noStrike">
-                          <a:solidFill>
-                            <a:srgbClr val="000000"/>
-                          </a:solidFill>
-                          <a:latin typeface="Arial"/>
-                          <a:ea typeface="Arial"/>
-                        </a:rPr>
-                        <a:t>DeBERTa + market floats</a:t>
-                      </a:r>
-                      <a:endParaRPr b="0" lang="en-US" sz="1200" spc="-1" strike="noStrike">
-                        <a:solidFill>
-                          <a:srgbClr val="000000"/>
-                        </a:solidFill>
-                        <a:latin typeface="Arial"/>
-                      </a:endParaRPr>
-                    </a:p>
-                  </a:txBody>
-                  <a:tcPr anchor="t" marL="91440" marR="91440">
-                    <a:lnL w="12240">
-                      <a:solidFill>
-                        <a:srgbClr val="ffffff"/>
-                      </a:solidFill>
-                      <a:prstDash val="solid"/>
-                    </a:lnL>
-                    <a:lnR w="12240">
-                      <a:solidFill>
-                        <a:srgbClr val="ffffff"/>
-                      </a:solidFill>
-                      <a:prstDash val="solid"/>
-                    </a:lnR>
-                    <a:lnT w="12240">
-                      <a:solidFill>
-                        <a:srgbClr val="ffffff"/>
-                      </a:solidFill>
-                      <a:prstDash val="solid"/>
-                    </a:lnT>
-                    <a:lnB w="12240">
-                      <a:solidFill>
-                        <a:srgbClr val="ffffff"/>
-                      </a:solidFill>
-                      <a:prstDash val="solid"/>
-                    </a:lnB>
-                    <a:solidFill>
-                      <a:srgbClr val="ced8fa"/>
-                    </a:solidFill>
-                  </a:tcPr>
-                </a:tc>
-                <a:tc>
-                  <a:txBody>
-                    <a:bodyPr anchor="t">
-                      <a:noAutofit/>
-                    </a:bodyPr>
-                    <a:p>
-                      <a:pPr>
-                        <a:lnSpc>
-                          <a:spcPct val="100000"/>
-                        </a:lnSpc>
-                      </a:pPr>
-                      <a:r>
-                        <a:rPr b="0" lang="en-US" sz="1200" spc="-1" strike="noStrike">
-                          <a:solidFill>
-                            <a:srgbClr val="000000"/>
-                          </a:solidFill>
-                          <a:latin typeface="Arial"/>
-                          <a:ea typeface="Arial"/>
-                        </a:rPr>
-                        <a:t>89.6 bps</a:t>
-                      </a:r>
-                      <a:endParaRPr b="0" lang="en-US" sz="1200" spc="-1" strike="noStrike">
-                        <a:solidFill>
-                          <a:srgbClr val="000000"/>
-                        </a:solidFill>
-                        <a:latin typeface="Arial"/>
-                      </a:endParaRPr>
-                    </a:p>
-                  </a:txBody>
-                  <a:tcPr anchor="t" marL="91440" marR="91440">
-                    <a:lnL w="12240">
-                      <a:solidFill>
-                        <a:srgbClr val="ffffff"/>
-                      </a:solidFill>
-                      <a:prstDash val="solid"/>
-                    </a:lnL>
-                    <a:lnR w="12240">
-                      <a:solidFill>
-                        <a:srgbClr val="ffffff"/>
-                      </a:solidFill>
-                      <a:prstDash val="solid"/>
-                    </a:lnR>
-                    <a:lnT w="12240">
-                      <a:solidFill>
-                        <a:srgbClr val="ffffff"/>
-                      </a:solidFill>
-                      <a:prstDash val="solid"/>
-                    </a:lnT>
-                    <a:lnB w="12240">
-                      <a:solidFill>
-                        <a:srgbClr val="ffffff"/>
-                      </a:solidFill>
-                      <a:prstDash val="solid"/>
-                    </a:lnB>
-                    <a:solidFill>
-                      <a:srgbClr val="ced8fa"/>
-                    </a:solidFill>
-                  </a:tcPr>
-                </a:tc>
-                <a:tc>
-                  <a:txBody>
-                    <a:bodyPr anchor="t">
-                      <a:noAutofit/>
-                    </a:bodyPr>
-                    <a:p>
-                      <a:pPr>
-                        <a:lnSpc>
-                          <a:spcPct val="100000"/>
-                        </a:lnSpc>
-                      </a:pPr>
-                      <a:r>
-                        <a:rPr b="0" lang="en-US" sz="1200" spc="-1" strike="noStrike">
-                          <a:solidFill>
-                            <a:srgbClr val="c0392b"/>
-                          </a:solidFill>
-                          <a:latin typeface="Arial"/>
-                          <a:ea typeface="Arial"/>
-                        </a:rPr>
-                        <a:t>-0.0015</a:t>
-                      </a:r>
-                      <a:endParaRPr b="0" lang="en-US" sz="1200" spc="-1" strike="noStrike">
-                        <a:solidFill>
-                          <a:srgbClr val="000000"/>
-                        </a:solidFill>
-                        <a:latin typeface="Arial"/>
-                      </a:endParaRPr>
-                    </a:p>
-                  </a:txBody>
-                  <a:tcPr anchor="t" marL="91440" marR="91440">
-                    <a:lnL w="12240">
-                      <a:solidFill>
-                        <a:srgbClr val="ffffff"/>
-                      </a:solidFill>
-                      <a:prstDash val="solid"/>
-                    </a:lnL>
-                    <a:lnR w="12240">
-                      <a:solidFill>
-                        <a:srgbClr val="ffffff"/>
-                      </a:solidFill>
-                      <a:prstDash val="solid"/>
-                    </a:lnR>
-                    <a:lnT w="12240">
-                      <a:solidFill>
-                        <a:srgbClr val="ffffff"/>
-                      </a:solidFill>
-                      <a:prstDash val="solid"/>
-                    </a:lnT>
-                    <a:lnB w="12240">
-                      <a:solidFill>
-                        <a:srgbClr val="ffffff"/>
-                      </a:solidFill>
-                      <a:prstDash val="solid"/>
-                    </a:lnB>
-                    <a:solidFill>
-                      <a:srgbClr val="ced8fa"/>
-                    </a:solidFill>
-                  </a:tcPr>
-                </a:tc>
-              </a:tr>
-              <a:tr h="274320">
-                <a:tc>
-                  <a:txBody>
-                    <a:bodyPr anchor="t">
-                      <a:noAutofit/>
-                    </a:bodyPr>
-                    <a:p>
-                      <a:pPr>
-                        <a:lnSpc>
-                          <a:spcPct val="100000"/>
-                        </a:lnSpc>
-                      </a:pPr>
-                      <a:r>
-                        <a:rPr b="0" lang="en-US" sz="1200" spc="-1" strike="noStrike">
-                          <a:solidFill>
-                            <a:srgbClr val="000000"/>
-                          </a:solidFill>
-                          <a:latin typeface="Arial"/>
-                          <a:ea typeface="Arial"/>
-                        </a:rPr>
-                        <a:t>2e</a:t>
-                      </a:r>
-                      <a:endParaRPr b="0" lang="en-US" sz="1200" spc="-1" strike="noStrike">
-                        <a:solidFill>
-                          <a:srgbClr val="000000"/>
-                        </a:solidFill>
-                        <a:latin typeface="Arial"/>
-                      </a:endParaRPr>
-                    </a:p>
-                  </a:txBody>
-                  <a:tcPr anchor="t" marL="91440" marR="91440">
-                    <a:lnL w="12240">
-                      <a:solidFill>
-                        <a:srgbClr val="ffffff"/>
-                      </a:solidFill>
-                      <a:prstDash val="solid"/>
-                    </a:lnL>
-                    <a:lnR w="12240">
-                      <a:solidFill>
-                        <a:srgbClr val="ffffff"/>
-                      </a:solidFill>
-                      <a:prstDash val="solid"/>
-                    </a:lnR>
-                    <a:lnT w="12240">
-                      <a:solidFill>
-                        <a:srgbClr val="ffffff"/>
-                      </a:solidFill>
-                      <a:prstDash val="solid"/>
-                    </a:lnT>
-                    <a:lnB w="12240">
-                      <a:solidFill>
-                        <a:srgbClr val="ffffff"/>
-                      </a:solidFill>
-                      <a:prstDash val="solid"/>
-                    </a:lnB>
-                    <a:solidFill>
-                      <a:srgbClr val="e8ecfc"/>
-                    </a:solidFill>
-                  </a:tcPr>
-                </a:tc>
-                <a:tc>
-                  <a:txBody>
-                    <a:bodyPr anchor="t">
-                      <a:noAutofit/>
-                    </a:bodyPr>
-                    <a:p>
-                      <a:pPr>
-                        <a:lnSpc>
-                          <a:spcPct val="100000"/>
-                        </a:lnSpc>
-                      </a:pPr>
-                      <a:r>
-                        <a:rPr b="0" lang="en-US" sz="1200" spc="-1" strike="noStrike">
-                          <a:solidFill>
-                            <a:srgbClr val="000000"/>
-                          </a:solidFill>
-                          <a:latin typeface="Arial"/>
-                          <a:ea typeface="Arial"/>
-                        </a:rPr>
-                        <a:t>Tree on 10 features (no text)</a:t>
-                      </a:r>
-                      <a:endParaRPr b="0" lang="en-US" sz="1200" spc="-1" strike="noStrike">
-                        <a:solidFill>
-                          <a:srgbClr val="000000"/>
-                        </a:solidFill>
-                        <a:latin typeface="Arial"/>
-                      </a:endParaRPr>
-                    </a:p>
-                  </a:txBody>
-                  <a:tcPr anchor="t" marL="91440" marR="91440">
-                    <a:lnL w="12240">
-                      <a:solidFill>
-                        <a:srgbClr val="ffffff"/>
-                      </a:solidFill>
-                      <a:prstDash val="solid"/>
-                    </a:lnL>
-                    <a:lnR w="12240">
-                      <a:solidFill>
-                        <a:srgbClr val="ffffff"/>
-                      </a:solidFill>
-                      <a:prstDash val="solid"/>
-                    </a:lnR>
-                    <a:lnT w="12240">
-                      <a:solidFill>
-                        <a:srgbClr val="ffffff"/>
-                      </a:solidFill>
-                      <a:prstDash val="solid"/>
-                    </a:lnT>
-                    <a:lnB w="12240">
-                      <a:solidFill>
-                        <a:srgbClr val="ffffff"/>
-                      </a:solidFill>
-                      <a:prstDash val="solid"/>
-                    </a:lnB>
-                    <a:solidFill>
-                      <a:srgbClr val="e8ecfc"/>
-                    </a:solidFill>
-                  </a:tcPr>
-                </a:tc>
-                <a:tc>
-                  <a:txBody>
-                    <a:bodyPr anchor="t">
-                      <a:noAutofit/>
-                    </a:bodyPr>
-                    <a:p>
-                      <a:pPr>
-                        <a:lnSpc>
-                          <a:spcPct val="100000"/>
-                        </a:lnSpc>
-                      </a:pPr>
-                      <a:r>
-                        <a:rPr b="0" lang="en-US" sz="1200" spc="-1" strike="noStrike">
-                          <a:solidFill>
-                            <a:srgbClr val="000000"/>
-                          </a:solidFill>
-                          <a:latin typeface="Arial"/>
-                          <a:ea typeface="Arial"/>
-                        </a:rPr>
-                        <a:t>~98 bps</a:t>
-                      </a:r>
-                      <a:endParaRPr b="0" lang="en-US" sz="1200" spc="-1" strike="noStrike">
-                        <a:solidFill>
-                          <a:srgbClr val="000000"/>
-                        </a:solidFill>
-                        <a:latin typeface="Arial"/>
-                      </a:endParaRPr>
-                    </a:p>
-                  </a:txBody>
-                  <a:tcPr anchor="t" marL="91440" marR="91440">
-                    <a:lnL w="12240">
-                      <a:solidFill>
-                        <a:srgbClr val="ffffff"/>
-                      </a:solidFill>
-                      <a:prstDash val="solid"/>
-                    </a:lnL>
-                    <a:lnR w="12240">
-                      <a:solidFill>
-                        <a:srgbClr val="ffffff"/>
-                      </a:solidFill>
-                      <a:prstDash val="solid"/>
-                    </a:lnR>
-                    <a:lnT w="12240">
-                      <a:solidFill>
-                        <a:srgbClr val="ffffff"/>
-                      </a:solidFill>
-                      <a:prstDash val="solid"/>
-                    </a:lnT>
-                    <a:lnB w="12240">
-                      <a:solidFill>
-                        <a:srgbClr val="ffffff"/>
-                      </a:solidFill>
-                      <a:prstDash val="solid"/>
-                    </a:lnB>
-                    <a:solidFill>
-                      <a:srgbClr val="e8ecfc"/>
-                    </a:solidFill>
-                  </a:tcPr>
-                </a:tc>
-                <a:tc>
-                  <a:txBody>
-                    <a:bodyPr anchor="t">
-                      <a:noAutofit/>
-                    </a:bodyPr>
-                    <a:p>
-                      <a:pPr>
-                        <a:lnSpc>
-                          <a:spcPct val="100000"/>
-                        </a:lnSpc>
-                      </a:pPr>
-                      <a:r>
-                        <a:rPr b="0" lang="en-US" sz="1200" spc="-1" strike="noStrike">
-                          <a:solidFill>
-                            <a:srgbClr val="c0392b"/>
-                          </a:solidFill>
-                          <a:latin typeface="Arial"/>
-                          <a:ea typeface="Arial"/>
-                        </a:rPr>
-                        <a:t>-0.1559</a:t>
-                      </a:r>
-                      <a:endParaRPr b="0" lang="en-US" sz="1200" spc="-1" strike="noStrike">
-                        <a:solidFill>
-                          <a:srgbClr val="000000"/>
-                        </a:solidFill>
-                        <a:latin typeface="Arial"/>
-                      </a:endParaRPr>
-                    </a:p>
-                  </a:txBody>
-                  <a:tcPr anchor="t" marL="91440" marR="91440">
-                    <a:lnL w="12240">
-                      <a:solidFill>
-                        <a:srgbClr val="ffffff"/>
-                      </a:solidFill>
-                      <a:prstDash val="solid"/>
-                    </a:lnL>
-                    <a:lnR w="12240">
-                      <a:solidFill>
-                        <a:srgbClr val="ffffff"/>
-                      </a:solidFill>
-                      <a:prstDash val="solid"/>
-                    </a:lnR>
-                    <a:lnT w="12240">
-                      <a:solidFill>
-                        <a:srgbClr val="ffffff"/>
-                      </a:solidFill>
-                      <a:prstDash val="solid"/>
-                    </a:lnT>
-                    <a:lnB w="12240">
-                      <a:solidFill>
-                        <a:srgbClr val="ffffff"/>
-                      </a:solidFill>
-                      <a:prstDash val="solid"/>
-                    </a:lnB>
-                    <a:solidFill>
-                      <a:srgbClr val="e8ecfc"/>
-                    </a:solidFill>
-                  </a:tcPr>
-                </a:tc>
-              </a:tr>
-            </a:tbl>
-          </a:graphicData>
-        </a:graphic>
-      </p:graphicFrame>
-      <p:sp>
-        <p:nvSpPr>
-          <p:cNvPr id="99" name="TextBox 3"/>
-          <p:cNvSpPr/>
-          <p:nvPr/>
-        </p:nvSpPr>
-        <p:spPr>
-          <a:xfrm>
-            <a:off x="311040" y="4023360"/>
-            <a:ext cx="8521920" cy="288000"/>
-          </a:xfrm>
-          <a:prstGeom prst="rect">
-            <a:avLst/>
-          </a:prstGeom>
-          <a:noFill/>
-          <a:ln w="0">
-            <a:noFill/>
-          </a:ln>
-        </p:spPr>
-        <p:style>
-          <a:lnRef idx="0"/>
-          <a:fillRef idx="0"/>
-          <a:effectRef idx="0"/>
-          <a:fontRef idx="minor"/>
-        </p:style>
-        <p:txBody>
-          <a:bodyPr lIns="90000" rIns="90000" tIns="45000" bIns="45000" anchor="t">
-            <a:spAutoFit/>
-          </a:bodyPr>
-          <a:p>
-            <a:pPr algn="ctr">
-              <a:lnSpc>
-                <a:spcPct val="100000"/>
-              </a:lnSpc>
-            </a:pPr>
-            <a:r>
-              <a:rPr b="1" lang="en-US" sz="1300" spc="-1" strike="noStrike">
-                <a:solidFill>
-                  <a:srgbClr val="c0392b"/>
-                </a:solidFill>
-                <a:latin typeface="Arial"/>
-                <a:ea typeface="Arial"/>
-              </a:rPr>
-              <a:t>Best model = the constant.   50× the capacity → the same flat line (prediction spread 2.6–2.8%).</a:t>
-            </a:r>
-            <a:endParaRPr b="0" lang="en-US" sz="1300" spc="-1" strike="noStrike">
-              <a:solidFill>
-                <a:srgbClr val="000000"/>
-              </a:solidFill>
-              <a:latin typeface="Arial"/>
-            </a:endParaRPr>
-          </a:p>
-        </p:txBody>
-      </p:sp>
     </p:spTree>
   </p:cSld>
   <mc:AlternateContent>
@@ -15428,6 +13831,1819 @@
       </p:grpSpPr>
       <p:sp>
         <p:nvSpPr>
+          <p:cNvPr id="97" name="PlaceHolder 1"/>
+          <p:cNvSpPr>
+            <a:spLocks noGrp="1"/>
+          </p:cNvSpPr>
+          <p:nvPr>
+            <p:ph type="title"/>
+          </p:nvPr>
+        </p:nvSpPr>
+        <p:spPr>
+          <a:xfrm>
+            <a:off x="311760" y="444960"/>
+            <a:ext cx="8520120" cy="572400"/>
+          </a:xfrm>
+          <a:prstGeom prst="rect">
+            <a:avLst/>
+          </a:prstGeom>
+          <a:noFill/>
+          <a:ln w="0">
+            <a:noFill/>
+          </a:ln>
+        </p:spPr>
+        <p:txBody>
+          <a:bodyPr lIns="91440" rIns="91440" tIns="91440" bIns="91440" anchor="t">
+            <a:noAutofit/>
+          </a:bodyPr>
+          <a:p>
+            <a:pPr indent="0">
+              <a:lnSpc>
+                <a:spcPct val="100000"/>
+              </a:lnSpc>
+              <a:buNone/>
+            </a:pPr>
+            <a:r>
+              <a:rPr b="0" lang="en-US" sz="2800" spc="-1" strike="noStrike">
+                <a:solidFill>
+                  <a:schemeClr val="dk1"/>
+                </a:solidFill>
+                <a:latin typeface="Arial"/>
+                <a:ea typeface="Arial"/>
+              </a:rPr>
+              <a:t>Nothing beats the constant</a:t>
+            </a:r>
+            <a:endParaRPr b="0" lang="en-US" sz="2800" spc="-1" strike="noStrike">
+              <a:solidFill>
+                <a:srgbClr val="000000"/>
+              </a:solidFill>
+              <a:latin typeface="Arial"/>
+            </a:endParaRPr>
+          </a:p>
+        </p:txBody>
+      </p:sp>
+      <p:graphicFrame>
+        <p:nvGraphicFramePr>
+          <p:cNvPr id="98" name="Table 2"/>
+          <p:cNvGraphicFramePr/>
+          <p:nvPr/>
+        </p:nvGraphicFramePr>
+        <p:xfrm>
+          <a:off x="685800" y="1143000"/>
+          <a:ext cx="7772040" cy="1920240"/>
+        </p:xfrm>
+        <a:graphic>
+          <a:graphicData uri="http://schemas.openxmlformats.org/drawingml/2006/table">
+            <a:tbl>
+              <a:tblPr/>
+              <a:tblGrid>
+                <a:gridCol w="548640"/>
+                <a:gridCol w="3657600"/>
+                <a:gridCol w="1828800"/>
+                <a:gridCol w="1737360"/>
+              </a:tblGrid>
+              <a:tr h="274320">
+                <a:tc>
+                  <a:txBody>
+                    <a:bodyPr anchor="t">
+                      <a:noAutofit/>
+                    </a:bodyPr>
+                    <a:p>
+                      <a:endParaRPr b="1" lang="en-US" sz="1200" spc="-1" strike="noStrike">
+                        <a:solidFill>
+                          <a:srgbClr val="ffffff"/>
+                        </a:solidFill>
+                        <a:latin typeface="Arial"/>
+                        <a:ea typeface="Arial"/>
+                      </a:endParaRPr>
+                    </a:p>
+                  </a:txBody>
+                  <a:tcPr anchor="t" marL="91440" marR="91440">
+                    <a:lnL w="12240">
+                      <a:solidFill>
+                        <a:srgbClr val="ffffff"/>
+                      </a:solidFill>
+                      <a:prstDash val="solid"/>
+                    </a:lnL>
+                    <a:lnR w="12240">
+                      <a:solidFill>
+                        <a:srgbClr val="ffffff"/>
+                      </a:solidFill>
+                      <a:prstDash val="solid"/>
+                    </a:lnR>
+                    <a:lnT w="12240">
+                      <a:solidFill>
+                        <a:srgbClr val="ffffff"/>
+                      </a:solidFill>
+                      <a:prstDash val="solid"/>
+                    </a:lnT>
+                    <a:lnB w="12240">
+                      <a:solidFill>
+                        <a:srgbClr val="ffffff"/>
+                      </a:solidFill>
+                      <a:prstDash val="solid"/>
+                    </a:lnB>
+                    <a:solidFill>
+                      <a:srgbClr val="4285f4"/>
+                    </a:solidFill>
+                  </a:tcPr>
+                </a:tc>
+                <a:tc>
+                  <a:txBody>
+                    <a:bodyPr anchor="t">
+                      <a:noAutofit/>
+                    </a:bodyPr>
+                    <a:p>
+                      <a:pPr>
+                        <a:lnSpc>
+                          <a:spcPct val="100000"/>
+                        </a:lnSpc>
+                      </a:pPr>
+                      <a:r>
+                        <a:rPr b="1" lang="en-US" sz="1200" spc="-1" strike="noStrike">
+                          <a:solidFill>
+                            <a:srgbClr val="ffffff"/>
+                          </a:solidFill>
+                          <a:latin typeface="Arial"/>
+                          <a:ea typeface="Arial"/>
+                        </a:rPr>
+                        <a:t>model</a:t>
+                      </a:r>
+                      <a:endParaRPr b="0" lang="en-US" sz="1200" spc="-1" strike="noStrike">
+                        <a:solidFill>
+                          <a:srgbClr val="ffffff"/>
+                        </a:solidFill>
+                        <a:latin typeface="Arial"/>
+                      </a:endParaRPr>
+                    </a:p>
+                  </a:txBody>
+                  <a:tcPr anchor="t" marL="91440" marR="91440">
+                    <a:lnL w="12240">
+                      <a:solidFill>
+                        <a:srgbClr val="ffffff"/>
+                      </a:solidFill>
+                      <a:prstDash val="solid"/>
+                    </a:lnL>
+                    <a:lnR w="12240">
+                      <a:solidFill>
+                        <a:srgbClr val="ffffff"/>
+                      </a:solidFill>
+                      <a:prstDash val="solid"/>
+                    </a:lnR>
+                    <a:lnT w="12240">
+                      <a:solidFill>
+                        <a:srgbClr val="ffffff"/>
+                      </a:solidFill>
+                      <a:prstDash val="solid"/>
+                    </a:lnT>
+                    <a:lnB w="12240">
+                      <a:solidFill>
+                        <a:srgbClr val="ffffff"/>
+                      </a:solidFill>
+                      <a:prstDash val="solid"/>
+                    </a:lnB>
+                    <a:solidFill>
+                      <a:srgbClr val="4285f4"/>
+                    </a:solidFill>
+                  </a:tcPr>
+                </a:tc>
+                <a:tc>
+                  <a:txBody>
+                    <a:bodyPr anchor="t">
+                      <a:noAutofit/>
+                    </a:bodyPr>
+                    <a:p>
+                      <a:pPr>
+                        <a:lnSpc>
+                          <a:spcPct val="100000"/>
+                        </a:lnSpc>
+                      </a:pPr>
+                      <a:r>
+                        <a:rPr b="1" lang="en-US" sz="1200" spc="-1" strike="noStrike">
+                          <a:solidFill>
+                            <a:srgbClr val="ffffff"/>
+                          </a:solidFill>
+                          <a:latin typeface="Arial"/>
+                          <a:ea typeface="Arial"/>
+                        </a:rPr>
+                        <a:t>test MAE</a:t>
+                      </a:r>
+                      <a:endParaRPr b="0" lang="en-US" sz="1200" spc="-1" strike="noStrike">
+                        <a:solidFill>
+                          <a:srgbClr val="ffffff"/>
+                        </a:solidFill>
+                        <a:latin typeface="Arial"/>
+                      </a:endParaRPr>
+                    </a:p>
+                  </a:txBody>
+                  <a:tcPr anchor="t" marL="91440" marR="91440">
+                    <a:lnL w="12240">
+                      <a:solidFill>
+                        <a:srgbClr val="ffffff"/>
+                      </a:solidFill>
+                      <a:prstDash val="solid"/>
+                    </a:lnL>
+                    <a:lnR w="12240">
+                      <a:solidFill>
+                        <a:srgbClr val="ffffff"/>
+                      </a:solidFill>
+                      <a:prstDash val="solid"/>
+                    </a:lnR>
+                    <a:lnT w="12240">
+                      <a:solidFill>
+                        <a:srgbClr val="ffffff"/>
+                      </a:solidFill>
+                      <a:prstDash val="solid"/>
+                    </a:lnT>
+                    <a:lnB w="12240">
+                      <a:solidFill>
+                        <a:srgbClr val="ffffff"/>
+                      </a:solidFill>
+                      <a:prstDash val="solid"/>
+                    </a:lnB>
+                    <a:solidFill>
+                      <a:srgbClr val="4285f4"/>
+                    </a:solidFill>
+                  </a:tcPr>
+                </a:tc>
+                <a:tc>
+                  <a:txBody>
+                    <a:bodyPr anchor="t">
+                      <a:noAutofit/>
+                    </a:bodyPr>
+                    <a:p>
+                      <a:pPr>
+                        <a:lnSpc>
+                          <a:spcPct val="100000"/>
+                        </a:lnSpc>
+                      </a:pPr>
+                      <a:r>
+                        <a:rPr b="1" lang="en-US" sz="1200" spc="-1" strike="noStrike">
+                          <a:solidFill>
+                            <a:srgbClr val="ffffff"/>
+                          </a:solidFill>
+                          <a:latin typeface="Arial"/>
+                          <a:ea typeface="Arial"/>
+                        </a:rPr>
+                        <a:t>R²</a:t>
+                      </a:r>
+                      <a:endParaRPr b="0" lang="en-US" sz="1200" spc="-1" strike="noStrike">
+                        <a:solidFill>
+                          <a:srgbClr val="ffffff"/>
+                        </a:solidFill>
+                        <a:latin typeface="Arial"/>
+                      </a:endParaRPr>
+                    </a:p>
+                  </a:txBody>
+                  <a:tcPr anchor="t" marL="91440" marR="91440">
+                    <a:lnL w="12240">
+                      <a:solidFill>
+                        <a:srgbClr val="ffffff"/>
+                      </a:solidFill>
+                      <a:prstDash val="solid"/>
+                    </a:lnL>
+                    <a:lnR w="12240">
+                      <a:solidFill>
+                        <a:srgbClr val="ffffff"/>
+                      </a:solidFill>
+                      <a:prstDash val="solid"/>
+                    </a:lnR>
+                    <a:lnT w="12240">
+                      <a:solidFill>
+                        <a:srgbClr val="ffffff"/>
+                      </a:solidFill>
+                      <a:prstDash val="solid"/>
+                    </a:lnT>
+                    <a:lnB w="12240">
+                      <a:solidFill>
+                        <a:srgbClr val="ffffff"/>
+                      </a:solidFill>
+                      <a:prstDash val="solid"/>
+                    </a:lnB>
+                    <a:solidFill>
+                      <a:srgbClr val="4285f4"/>
+                    </a:solidFill>
+                  </a:tcPr>
+                </a:tc>
+              </a:tr>
+              <a:tr h="274320">
+                <a:tc>
+                  <a:txBody>
+                    <a:bodyPr anchor="t">
+                      <a:noAutofit/>
+                    </a:bodyPr>
+                    <a:p>
+                      <a:pPr>
+                        <a:lnSpc>
+                          <a:spcPct val="100000"/>
+                        </a:lnSpc>
+                      </a:pPr>
+                      <a:r>
+                        <a:rPr b="0" lang="en-US" sz="1200" spc="-1" strike="noStrike">
+                          <a:solidFill>
+                            <a:srgbClr val="000000"/>
+                          </a:solidFill>
+                          <a:latin typeface="Arial"/>
+                          <a:ea typeface="Arial"/>
+                        </a:rPr>
+                        <a:t>—</a:t>
+                      </a:r>
+                      <a:endParaRPr b="0" lang="en-US" sz="1200" spc="-1" strike="noStrike">
+                        <a:solidFill>
+                          <a:srgbClr val="000000"/>
+                        </a:solidFill>
+                        <a:latin typeface="Arial"/>
+                      </a:endParaRPr>
+                    </a:p>
+                  </a:txBody>
+                  <a:tcPr anchor="t" marL="91440" marR="91440">
+                    <a:lnL w="12240">
+                      <a:solidFill>
+                        <a:srgbClr val="ffffff"/>
+                      </a:solidFill>
+                      <a:prstDash val="solid"/>
+                    </a:lnL>
+                    <a:lnR w="12240">
+                      <a:solidFill>
+                        <a:srgbClr val="ffffff"/>
+                      </a:solidFill>
+                      <a:prstDash val="solid"/>
+                    </a:lnR>
+                    <a:lnT w="12240">
+                      <a:solidFill>
+                        <a:srgbClr val="ffffff"/>
+                      </a:solidFill>
+                      <a:prstDash val="solid"/>
+                    </a:lnT>
+                    <a:lnB w="12240">
+                      <a:solidFill>
+                        <a:srgbClr val="ffffff"/>
+                      </a:solidFill>
+                      <a:prstDash val="solid"/>
+                    </a:lnB>
+                    <a:solidFill>
+                      <a:srgbClr val="ced8fa"/>
+                    </a:solidFill>
+                  </a:tcPr>
+                </a:tc>
+                <a:tc>
+                  <a:txBody>
+                    <a:bodyPr anchor="t">
+                      <a:noAutofit/>
+                    </a:bodyPr>
+                    <a:p>
+                      <a:pPr>
+                        <a:lnSpc>
+                          <a:spcPct val="100000"/>
+                        </a:lnSpc>
+                      </a:pPr>
+                      <a:r>
+                        <a:rPr b="0" lang="en-US" sz="1200" spc="-1" strike="noStrike">
+                          <a:solidFill>
+                            <a:srgbClr val="000000"/>
+                          </a:solidFill>
+                          <a:latin typeface="Arial"/>
+                          <a:ea typeface="Arial"/>
+                        </a:rPr>
+                        <a:t>constant (predict the mean)</a:t>
+                      </a:r>
+                      <a:endParaRPr b="0" lang="en-US" sz="1200" spc="-1" strike="noStrike">
+                        <a:solidFill>
+                          <a:srgbClr val="000000"/>
+                        </a:solidFill>
+                        <a:latin typeface="Arial"/>
+                      </a:endParaRPr>
+                    </a:p>
+                  </a:txBody>
+                  <a:tcPr anchor="t" marL="91440" marR="91440">
+                    <a:lnL w="12240">
+                      <a:solidFill>
+                        <a:srgbClr val="ffffff"/>
+                      </a:solidFill>
+                      <a:prstDash val="solid"/>
+                    </a:lnL>
+                    <a:lnR w="12240">
+                      <a:solidFill>
+                        <a:srgbClr val="ffffff"/>
+                      </a:solidFill>
+                      <a:prstDash val="solid"/>
+                    </a:lnR>
+                    <a:lnT w="12240">
+                      <a:solidFill>
+                        <a:srgbClr val="ffffff"/>
+                      </a:solidFill>
+                      <a:prstDash val="solid"/>
+                    </a:lnT>
+                    <a:lnB w="12240">
+                      <a:solidFill>
+                        <a:srgbClr val="ffffff"/>
+                      </a:solidFill>
+                      <a:prstDash val="solid"/>
+                    </a:lnB>
+                    <a:solidFill>
+                      <a:srgbClr val="ced8fa"/>
+                    </a:solidFill>
+                  </a:tcPr>
+                </a:tc>
+                <a:tc>
+                  <a:txBody>
+                    <a:bodyPr anchor="t">
+                      <a:noAutofit/>
+                    </a:bodyPr>
+                    <a:p>
+                      <a:pPr>
+                        <a:lnSpc>
+                          <a:spcPct val="100000"/>
+                        </a:lnSpc>
+                      </a:pPr>
+                      <a:r>
+                        <a:rPr b="0" lang="en-US" sz="1200" spc="-1" strike="noStrike">
+                          <a:solidFill>
+                            <a:srgbClr val="000000"/>
+                          </a:solidFill>
+                          <a:latin typeface="Arial"/>
+                          <a:ea typeface="Arial"/>
+                        </a:rPr>
+                        <a:t>74.1 bps</a:t>
+                      </a:r>
+                      <a:endParaRPr b="0" lang="en-US" sz="1200" spc="-1" strike="noStrike">
+                        <a:solidFill>
+                          <a:srgbClr val="000000"/>
+                        </a:solidFill>
+                        <a:latin typeface="Arial"/>
+                      </a:endParaRPr>
+                    </a:p>
+                  </a:txBody>
+                  <a:tcPr anchor="t" marL="91440" marR="91440">
+                    <a:lnL w="12240">
+                      <a:solidFill>
+                        <a:srgbClr val="ffffff"/>
+                      </a:solidFill>
+                      <a:prstDash val="solid"/>
+                    </a:lnL>
+                    <a:lnR w="12240">
+                      <a:solidFill>
+                        <a:srgbClr val="ffffff"/>
+                      </a:solidFill>
+                      <a:prstDash val="solid"/>
+                    </a:lnR>
+                    <a:lnT w="12240">
+                      <a:solidFill>
+                        <a:srgbClr val="ffffff"/>
+                      </a:solidFill>
+                      <a:prstDash val="solid"/>
+                    </a:lnT>
+                    <a:lnB w="12240">
+                      <a:solidFill>
+                        <a:srgbClr val="ffffff"/>
+                      </a:solidFill>
+                      <a:prstDash val="solid"/>
+                    </a:lnB>
+                    <a:solidFill>
+                      <a:srgbClr val="ced8fa"/>
+                    </a:solidFill>
+                  </a:tcPr>
+                </a:tc>
+                <a:tc>
+                  <a:txBody>
+                    <a:bodyPr anchor="t">
+                      <a:noAutofit/>
+                    </a:bodyPr>
+                    <a:p>
+                      <a:pPr>
+                        <a:lnSpc>
+                          <a:spcPct val="100000"/>
+                        </a:lnSpc>
+                      </a:pPr>
+                      <a:r>
+                        <a:rPr b="0" lang="en-US" sz="1200" spc="-1" strike="noStrike">
+                          <a:solidFill>
+                            <a:srgbClr val="000000"/>
+                          </a:solidFill>
+                          <a:latin typeface="Arial"/>
+                          <a:ea typeface="Arial"/>
+                        </a:rPr>
+                        <a:t>0.0000</a:t>
+                      </a:r>
+                      <a:endParaRPr b="0" lang="en-US" sz="1200" spc="-1" strike="noStrike">
+                        <a:solidFill>
+                          <a:srgbClr val="000000"/>
+                        </a:solidFill>
+                        <a:latin typeface="Arial"/>
+                      </a:endParaRPr>
+                    </a:p>
+                  </a:txBody>
+                  <a:tcPr anchor="t" marL="91440" marR="91440">
+                    <a:lnL w="12240">
+                      <a:solidFill>
+                        <a:srgbClr val="ffffff"/>
+                      </a:solidFill>
+                      <a:prstDash val="solid"/>
+                    </a:lnL>
+                    <a:lnR w="12240">
+                      <a:solidFill>
+                        <a:srgbClr val="ffffff"/>
+                      </a:solidFill>
+                      <a:prstDash val="solid"/>
+                    </a:lnR>
+                    <a:lnT w="12240">
+                      <a:solidFill>
+                        <a:srgbClr val="ffffff"/>
+                      </a:solidFill>
+                      <a:prstDash val="solid"/>
+                    </a:lnT>
+                    <a:lnB w="12240">
+                      <a:solidFill>
+                        <a:srgbClr val="ffffff"/>
+                      </a:solidFill>
+                      <a:prstDash val="solid"/>
+                    </a:lnB>
+                    <a:solidFill>
+                      <a:srgbClr val="ced8fa"/>
+                    </a:solidFill>
+                  </a:tcPr>
+                </a:tc>
+              </a:tr>
+              <a:tr h="274320">
+                <a:tc>
+                  <a:txBody>
+                    <a:bodyPr anchor="t">
+                      <a:noAutofit/>
+                    </a:bodyPr>
+                    <a:p>
+                      <a:pPr>
+                        <a:lnSpc>
+                          <a:spcPct val="100000"/>
+                        </a:lnSpc>
+                      </a:pPr>
+                      <a:r>
+                        <a:rPr b="0" lang="en-US" sz="1200" spc="-1" strike="noStrike">
+                          <a:solidFill>
+                            <a:srgbClr val="000000"/>
+                          </a:solidFill>
+                          <a:latin typeface="Arial"/>
+                          <a:ea typeface="Arial"/>
+                        </a:rPr>
+                        <a:t>2a</a:t>
+                      </a:r>
+                      <a:endParaRPr b="0" lang="en-US" sz="1200" spc="-1" strike="noStrike">
+                        <a:solidFill>
+                          <a:srgbClr val="000000"/>
+                        </a:solidFill>
+                        <a:latin typeface="Arial"/>
+                      </a:endParaRPr>
+                    </a:p>
+                  </a:txBody>
+                  <a:tcPr anchor="t" marL="91440" marR="91440">
+                    <a:lnL w="12240">
+                      <a:solidFill>
+                        <a:srgbClr val="ffffff"/>
+                      </a:solidFill>
+                      <a:prstDash val="solid"/>
+                    </a:lnL>
+                    <a:lnR w="12240">
+                      <a:solidFill>
+                        <a:srgbClr val="ffffff"/>
+                      </a:solidFill>
+                      <a:prstDash val="solid"/>
+                    </a:lnR>
+                    <a:lnT w="12240">
+                      <a:solidFill>
+                        <a:srgbClr val="ffffff"/>
+                      </a:solidFill>
+                      <a:prstDash val="solid"/>
+                    </a:lnT>
+                    <a:lnB w="12240">
+                      <a:solidFill>
+                        <a:srgbClr val="ffffff"/>
+                      </a:solidFill>
+                      <a:prstDash val="solid"/>
+                    </a:lnB>
+                    <a:solidFill>
+                      <a:srgbClr val="e8ecfc"/>
+                    </a:solidFill>
+                  </a:tcPr>
+                </a:tc>
+                <a:tc>
+                  <a:txBody>
+                    <a:bodyPr anchor="t">
+                      <a:noAutofit/>
+                    </a:bodyPr>
+                    <a:p>
+                      <a:pPr>
+                        <a:lnSpc>
+                          <a:spcPct val="100000"/>
+                        </a:lnSpc>
+                      </a:pPr>
+                      <a:r>
+                        <a:rPr b="0" lang="en-US" sz="1200" spc="-1" strike="noStrike">
+                          <a:solidFill>
+                            <a:srgbClr val="000000"/>
+                          </a:solidFill>
+                          <a:latin typeface="Arial"/>
+                          <a:ea typeface="Arial"/>
+                        </a:rPr>
+                        <a:t>Encoder + NN (separate)</a:t>
+                      </a:r>
+                      <a:endParaRPr b="0" lang="en-US" sz="1200" spc="-1" strike="noStrike">
+                        <a:solidFill>
+                          <a:srgbClr val="000000"/>
+                        </a:solidFill>
+                        <a:latin typeface="Arial"/>
+                      </a:endParaRPr>
+                    </a:p>
+                  </a:txBody>
+                  <a:tcPr anchor="t" marL="91440" marR="91440">
+                    <a:lnL w="12240">
+                      <a:solidFill>
+                        <a:srgbClr val="ffffff"/>
+                      </a:solidFill>
+                      <a:prstDash val="solid"/>
+                    </a:lnL>
+                    <a:lnR w="12240">
+                      <a:solidFill>
+                        <a:srgbClr val="ffffff"/>
+                      </a:solidFill>
+                      <a:prstDash val="solid"/>
+                    </a:lnR>
+                    <a:lnT w="12240">
+                      <a:solidFill>
+                        <a:srgbClr val="ffffff"/>
+                      </a:solidFill>
+                      <a:prstDash val="solid"/>
+                    </a:lnT>
+                    <a:lnB w="12240">
+                      <a:solidFill>
+                        <a:srgbClr val="ffffff"/>
+                      </a:solidFill>
+                      <a:prstDash val="solid"/>
+                    </a:lnB>
+                    <a:solidFill>
+                      <a:srgbClr val="e8ecfc"/>
+                    </a:solidFill>
+                  </a:tcPr>
+                </a:tc>
+                <a:tc>
+                  <a:txBody>
+                    <a:bodyPr anchor="t">
+                      <a:noAutofit/>
+                    </a:bodyPr>
+                    <a:p>
+                      <a:pPr>
+                        <a:lnSpc>
+                          <a:spcPct val="100000"/>
+                        </a:lnSpc>
+                      </a:pPr>
+                      <a:r>
+                        <a:rPr b="0" lang="en-US" sz="1200" spc="-1" strike="noStrike">
+                          <a:solidFill>
+                            <a:srgbClr val="000000"/>
+                          </a:solidFill>
+                          <a:latin typeface="Arial"/>
+                          <a:ea typeface="Arial"/>
+                        </a:rPr>
+                        <a:t>78.5 bps</a:t>
+                      </a:r>
+                      <a:endParaRPr b="0" lang="en-US" sz="1200" spc="-1" strike="noStrike">
+                        <a:solidFill>
+                          <a:srgbClr val="000000"/>
+                        </a:solidFill>
+                        <a:latin typeface="Arial"/>
+                      </a:endParaRPr>
+                    </a:p>
+                  </a:txBody>
+                  <a:tcPr anchor="t" marL="91440" marR="91440">
+                    <a:lnL w="12240">
+                      <a:solidFill>
+                        <a:srgbClr val="ffffff"/>
+                      </a:solidFill>
+                      <a:prstDash val="solid"/>
+                    </a:lnL>
+                    <a:lnR w="12240">
+                      <a:solidFill>
+                        <a:srgbClr val="ffffff"/>
+                      </a:solidFill>
+                      <a:prstDash val="solid"/>
+                    </a:lnR>
+                    <a:lnT w="12240">
+                      <a:solidFill>
+                        <a:srgbClr val="ffffff"/>
+                      </a:solidFill>
+                      <a:prstDash val="solid"/>
+                    </a:lnT>
+                    <a:lnB w="12240">
+                      <a:solidFill>
+                        <a:srgbClr val="ffffff"/>
+                      </a:solidFill>
+                      <a:prstDash val="solid"/>
+                    </a:lnB>
+                    <a:solidFill>
+                      <a:srgbClr val="e8ecfc"/>
+                    </a:solidFill>
+                  </a:tcPr>
+                </a:tc>
+                <a:tc>
+                  <a:txBody>
+                    <a:bodyPr anchor="t">
+                      <a:noAutofit/>
+                    </a:bodyPr>
+                    <a:p>
+                      <a:pPr>
+                        <a:lnSpc>
+                          <a:spcPct val="100000"/>
+                        </a:lnSpc>
+                      </a:pPr>
+                      <a:r>
+                        <a:rPr b="0" lang="en-US" sz="1200" spc="-1" strike="noStrike">
+                          <a:solidFill>
+                            <a:srgbClr val="c0392b"/>
+                          </a:solidFill>
+                          <a:latin typeface="Arial"/>
+                          <a:ea typeface="Arial"/>
+                        </a:rPr>
+                        <a:t>-0.0529</a:t>
+                      </a:r>
+                      <a:endParaRPr b="0" lang="en-US" sz="1200" spc="-1" strike="noStrike">
+                        <a:solidFill>
+                          <a:srgbClr val="000000"/>
+                        </a:solidFill>
+                        <a:latin typeface="Arial"/>
+                      </a:endParaRPr>
+                    </a:p>
+                  </a:txBody>
+                  <a:tcPr anchor="t" marL="91440" marR="91440">
+                    <a:lnL w="12240">
+                      <a:solidFill>
+                        <a:srgbClr val="ffffff"/>
+                      </a:solidFill>
+                      <a:prstDash val="solid"/>
+                    </a:lnL>
+                    <a:lnR w="12240">
+                      <a:solidFill>
+                        <a:srgbClr val="ffffff"/>
+                      </a:solidFill>
+                      <a:prstDash val="solid"/>
+                    </a:lnR>
+                    <a:lnT w="12240">
+                      <a:solidFill>
+                        <a:srgbClr val="ffffff"/>
+                      </a:solidFill>
+                      <a:prstDash val="solid"/>
+                    </a:lnT>
+                    <a:lnB w="12240">
+                      <a:solidFill>
+                        <a:srgbClr val="ffffff"/>
+                      </a:solidFill>
+                      <a:prstDash val="solid"/>
+                    </a:lnB>
+                    <a:solidFill>
+                      <a:srgbClr val="e8ecfc"/>
+                    </a:solidFill>
+                  </a:tcPr>
+                </a:tc>
+              </a:tr>
+              <a:tr h="274320">
+                <a:tc>
+                  <a:txBody>
+                    <a:bodyPr anchor="t">
+                      <a:noAutofit/>
+                    </a:bodyPr>
+                    <a:p>
+                      <a:pPr>
+                        <a:lnSpc>
+                          <a:spcPct val="100000"/>
+                        </a:lnSpc>
+                      </a:pPr>
+                      <a:r>
+                        <a:rPr b="0" lang="en-US" sz="1200" spc="-1" strike="noStrike">
+                          <a:solidFill>
+                            <a:srgbClr val="000000"/>
+                          </a:solidFill>
+                          <a:latin typeface="Arial"/>
+                          <a:ea typeface="Arial"/>
+                        </a:rPr>
+                        <a:t>2b</a:t>
+                      </a:r>
+                      <a:endParaRPr b="0" lang="en-US" sz="1200" spc="-1" strike="noStrike">
+                        <a:solidFill>
+                          <a:srgbClr val="000000"/>
+                        </a:solidFill>
+                        <a:latin typeface="Arial"/>
+                      </a:endParaRPr>
+                    </a:p>
+                  </a:txBody>
+                  <a:tcPr anchor="t" marL="91440" marR="91440">
+                    <a:lnL w="12240">
+                      <a:solidFill>
+                        <a:srgbClr val="ffffff"/>
+                      </a:solidFill>
+                      <a:prstDash val="solid"/>
+                    </a:lnL>
+                    <a:lnR w="12240">
+                      <a:solidFill>
+                        <a:srgbClr val="ffffff"/>
+                      </a:solidFill>
+                      <a:prstDash val="solid"/>
+                    </a:lnR>
+                    <a:lnT w="12240">
+                      <a:solidFill>
+                        <a:srgbClr val="ffffff"/>
+                      </a:solidFill>
+                      <a:prstDash val="solid"/>
+                    </a:lnT>
+                    <a:lnB w="12240">
+                      <a:solidFill>
+                        <a:srgbClr val="ffffff"/>
+                      </a:solidFill>
+                      <a:prstDash val="solid"/>
+                    </a:lnB>
+                    <a:solidFill>
+                      <a:srgbClr val="ced8fa"/>
+                    </a:solidFill>
+                  </a:tcPr>
+                </a:tc>
+                <a:tc>
+                  <a:txBody>
+                    <a:bodyPr anchor="t">
+                      <a:noAutofit/>
+                    </a:bodyPr>
+                    <a:p>
+                      <a:pPr>
+                        <a:lnSpc>
+                          <a:spcPct val="100000"/>
+                        </a:lnSpc>
+                      </a:pPr>
+                      <a:r>
+                        <a:rPr b="0" lang="en-US" sz="1200" spc="-1" strike="noStrike">
+                          <a:solidFill>
+                            <a:srgbClr val="000000"/>
+                          </a:solidFill>
+                          <a:latin typeface="Arial"/>
+                          <a:ea typeface="Arial"/>
+                        </a:rPr>
+                        <a:t>Encoder + NN (combined)</a:t>
+                      </a:r>
+                      <a:endParaRPr b="0" lang="en-US" sz="1200" spc="-1" strike="noStrike">
+                        <a:solidFill>
+                          <a:srgbClr val="000000"/>
+                        </a:solidFill>
+                        <a:latin typeface="Arial"/>
+                      </a:endParaRPr>
+                    </a:p>
+                  </a:txBody>
+                  <a:tcPr anchor="t" marL="91440" marR="91440">
+                    <a:lnL w="12240">
+                      <a:solidFill>
+                        <a:srgbClr val="ffffff"/>
+                      </a:solidFill>
+                      <a:prstDash val="solid"/>
+                    </a:lnL>
+                    <a:lnR w="12240">
+                      <a:solidFill>
+                        <a:srgbClr val="ffffff"/>
+                      </a:solidFill>
+                      <a:prstDash val="solid"/>
+                    </a:lnR>
+                    <a:lnT w="12240">
+                      <a:solidFill>
+                        <a:srgbClr val="ffffff"/>
+                      </a:solidFill>
+                      <a:prstDash val="solid"/>
+                    </a:lnT>
+                    <a:lnB w="12240">
+                      <a:solidFill>
+                        <a:srgbClr val="ffffff"/>
+                      </a:solidFill>
+                      <a:prstDash val="solid"/>
+                    </a:lnB>
+                    <a:solidFill>
+                      <a:srgbClr val="ced8fa"/>
+                    </a:solidFill>
+                  </a:tcPr>
+                </a:tc>
+                <a:tc>
+                  <a:txBody>
+                    <a:bodyPr anchor="t">
+                      <a:noAutofit/>
+                    </a:bodyPr>
+                    <a:p>
+                      <a:pPr>
+                        <a:lnSpc>
+                          <a:spcPct val="100000"/>
+                        </a:lnSpc>
+                      </a:pPr>
+                      <a:r>
+                        <a:rPr b="0" lang="en-US" sz="1200" spc="-1" strike="noStrike">
+                          <a:solidFill>
+                            <a:srgbClr val="000000"/>
+                          </a:solidFill>
+                          <a:latin typeface="Arial"/>
+                          <a:ea typeface="Arial"/>
+                        </a:rPr>
+                        <a:t>75.1 bps</a:t>
+                      </a:r>
+                      <a:endParaRPr b="0" lang="en-US" sz="1200" spc="-1" strike="noStrike">
+                        <a:solidFill>
+                          <a:srgbClr val="000000"/>
+                        </a:solidFill>
+                        <a:latin typeface="Arial"/>
+                      </a:endParaRPr>
+                    </a:p>
+                  </a:txBody>
+                  <a:tcPr anchor="t" marL="91440" marR="91440">
+                    <a:lnL w="12240">
+                      <a:solidFill>
+                        <a:srgbClr val="ffffff"/>
+                      </a:solidFill>
+                      <a:prstDash val="solid"/>
+                    </a:lnL>
+                    <a:lnR w="12240">
+                      <a:solidFill>
+                        <a:srgbClr val="ffffff"/>
+                      </a:solidFill>
+                      <a:prstDash val="solid"/>
+                    </a:lnR>
+                    <a:lnT w="12240">
+                      <a:solidFill>
+                        <a:srgbClr val="ffffff"/>
+                      </a:solidFill>
+                      <a:prstDash val="solid"/>
+                    </a:lnT>
+                    <a:lnB w="12240">
+                      <a:solidFill>
+                        <a:srgbClr val="ffffff"/>
+                      </a:solidFill>
+                      <a:prstDash val="solid"/>
+                    </a:lnB>
+                    <a:solidFill>
+                      <a:srgbClr val="ced8fa"/>
+                    </a:solidFill>
+                  </a:tcPr>
+                </a:tc>
+                <a:tc>
+                  <a:txBody>
+                    <a:bodyPr anchor="t">
+                      <a:noAutofit/>
+                    </a:bodyPr>
+                    <a:p>
+                      <a:pPr>
+                        <a:lnSpc>
+                          <a:spcPct val="100000"/>
+                        </a:lnSpc>
+                      </a:pPr>
+                      <a:r>
+                        <a:rPr b="0" lang="en-US" sz="1200" spc="-1" strike="noStrike">
+                          <a:solidFill>
+                            <a:srgbClr val="c0392b"/>
+                          </a:solidFill>
+                          <a:latin typeface="Arial"/>
+                          <a:ea typeface="Arial"/>
+                        </a:rPr>
+                        <a:t>-0.0049</a:t>
+                      </a:r>
+                      <a:endParaRPr b="0" lang="en-US" sz="1200" spc="-1" strike="noStrike">
+                        <a:solidFill>
+                          <a:srgbClr val="000000"/>
+                        </a:solidFill>
+                        <a:latin typeface="Arial"/>
+                      </a:endParaRPr>
+                    </a:p>
+                  </a:txBody>
+                  <a:tcPr anchor="t" marL="91440" marR="91440">
+                    <a:lnL w="12240">
+                      <a:solidFill>
+                        <a:srgbClr val="ffffff"/>
+                      </a:solidFill>
+                      <a:prstDash val="solid"/>
+                    </a:lnL>
+                    <a:lnR w="12240">
+                      <a:solidFill>
+                        <a:srgbClr val="ffffff"/>
+                      </a:solidFill>
+                      <a:prstDash val="solid"/>
+                    </a:lnR>
+                    <a:lnT w="12240">
+                      <a:solidFill>
+                        <a:srgbClr val="ffffff"/>
+                      </a:solidFill>
+                      <a:prstDash val="solid"/>
+                    </a:lnT>
+                    <a:lnB w="12240">
+                      <a:solidFill>
+                        <a:srgbClr val="ffffff"/>
+                      </a:solidFill>
+                      <a:prstDash val="solid"/>
+                    </a:lnB>
+                    <a:solidFill>
+                      <a:srgbClr val="ced8fa"/>
+                    </a:solidFill>
+                  </a:tcPr>
+                </a:tc>
+              </a:tr>
+              <a:tr h="274320">
+                <a:tc>
+                  <a:txBody>
+                    <a:bodyPr anchor="t">
+                      <a:noAutofit/>
+                    </a:bodyPr>
+                    <a:p>
+                      <a:pPr>
+                        <a:lnSpc>
+                          <a:spcPct val="100000"/>
+                        </a:lnSpc>
+                      </a:pPr>
+                      <a:r>
+                        <a:rPr b="0" lang="en-US" sz="1200" spc="-1" strike="noStrike">
+                          <a:solidFill>
+                            <a:srgbClr val="000000"/>
+                          </a:solidFill>
+                          <a:latin typeface="Arial"/>
+                          <a:ea typeface="Arial"/>
+                        </a:rPr>
+                        <a:t>2c</a:t>
+                      </a:r>
+                      <a:endParaRPr b="0" lang="en-US" sz="1200" spc="-1" strike="noStrike">
+                        <a:solidFill>
+                          <a:srgbClr val="000000"/>
+                        </a:solidFill>
+                        <a:latin typeface="Arial"/>
+                      </a:endParaRPr>
+                    </a:p>
+                  </a:txBody>
+                  <a:tcPr anchor="t" marL="91440" marR="91440">
+                    <a:lnL w="12240">
+                      <a:solidFill>
+                        <a:srgbClr val="ffffff"/>
+                      </a:solidFill>
+                      <a:prstDash val="solid"/>
+                    </a:lnL>
+                    <a:lnR w="12240">
+                      <a:solidFill>
+                        <a:srgbClr val="ffffff"/>
+                      </a:solidFill>
+                      <a:prstDash val="solid"/>
+                    </a:lnR>
+                    <a:lnT w="12240">
+                      <a:solidFill>
+                        <a:srgbClr val="ffffff"/>
+                      </a:solidFill>
+                      <a:prstDash val="solid"/>
+                    </a:lnT>
+                    <a:lnB w="12240">
+                      <a:solidFill>
+                        <a:srgbClr val="ffffff"/>
+                      </a:solidFill>
+                      <a:prstDash val="solid"/>
+                    </a:lnB>
+                    <a:solidFill>
+                      <a:srgbClr val="e8ecfc"/>
+                    </a:solidFill>
+                  </a:tcPr>
+                </a:tc>
+                <a:tc>
+                  <a:txBody>
+                    <a:bodyPr anchor="t">
+                      <a:noAutofit/>
+                    </a:bodyPr>
+                    <a:p>
+                      <a:pPr>
+                        <a:lnSpc>
+                          <a:spcPct val="100000"/>
+                        </a:lnSpc>
+                      </a:pPr>
+                      <a:r>
+                        <a:rPr b="0" lang="en-US" sz="1200" spc="-1" strike="noStrike">
+                          <a:solidFill>
+                            <a:srgbClr val="000000"/>
+                          </a:solidFill>
+                          <a:latin typeface="Arial"/>
+                          <a:ea typeface="Arial"/>
+                        </a:rPr>
+                        <a:t>Fine-tuned LLM (LoRA)</a:t>
+                      </a:r>
+                      <a:endParaRPr b="0" lang="en-US" sz="1200" spc="-1" strike="noStrike">
+                        <a:solidFill>
+                          <a:srgbClr val="000000"/>
+                        </a:solidFill>
+                        <a:latin typeface="Arial"/>
+                      </a:endParaRPr>
+                    </a:p>
+                  </a:txBody>
+                  <a:tcPr anchor="t" marL="91440" marR="91440">
+                    <a:lnL w="12240">
+                      <a:solidFill>
+                        <a:srgbClr val="ffffff"/>
+                      </a:solidFill>
+                      <a:prstDash val="solid"/>
+                    </a:lnL>
+                    <a:lnR w="12240">
+                      <a:solidFill>
+                        <a:srgbClr val="ffffff"/>
+                      </a:solidFill>
+                      <a:prstDash val="solid"/>
+                    </a:lnR>
+                    <a:lnT w="12240">
+                      <a:solidFill>
+                        <a:srgbClr val="ffffff"/>
+                      </a:solidFill>
+                      <a:prstDash val="solid"/>
+                    </a:lnT>
+                    <a:lnB w="12240">
+                      <a:solidFill>
+                        <a:srgbClr val="ffffff"/>
+                      </a:solidFill>
+                      <a:prstDash val="solid"/>
+                    </a:lnB>
+                    <a:solidFill>
+                      <a:srgbClr val="e8ecfc"/>
+                    </a:solidFill>
+                  </a:tcPr>
+                </a:tc>
+                <a:tc>
+                  <a:txBody>
+                    <a:bodyPr anchor="t">
+                      <a:noAutofit/>
+                    </a:bodyPr>
+                    <a:p>
+                      <a:pPr>
+                        <a:lnSpc>
+                          <a:spcPct val="100000"/>
+                        </a:lnSpc>
+                      </a:pPr>
+                      <a:r>
+                        <a:rPr b="0" lang="en-US" sz="1200" spc="-1" strike="noStrike">
+                          <a:solidFill>
+                            <a:srgbClr val="000000"/>
+                          </a:solidFill>
+                          <a:latin typeface="Arial"/>
+                          <a:ea typeface="Arial"/>
+                        </a:rPr>
+                        <a:t>274.1 bps</a:t>
+                      </a:r>
+                      <a:endParaRPr b="0" lang="en-US" sz="1200" spc="-1" strike="noStrike">
+                        <a:solidFill>
+                          <a:srgbClr val="000000"/>
+                        </a:solidFill>
+                        <a:latin typeface="Arial"/>
+                      </a:endParaRPr>
+                    </a:p>
+                  </a:txBody>
+                  <a:tcPr anchor="t" marL="91440" marR="91440">
+                    <a:lnL w="12240">
+                      <a:solidFill>
+                        <a:srgbClr val="ffffff"/>
+                      </a:solidFill>
+                      <a:prstDash val="solid"/>
+                    </a:lnL>
+                    <a:lnR w="12240">
+                      <a:solidFill>
+                        <a:srgbClr val="ffffff"/>
+                      </a:solidFill>
+                      <a:prstDash val="solid"/>
+                    </a:lnR>
+                    <a:lnT w="12240">
+                      <a:solidFill>
+                        <a:srgbClr val="ffffff"/>
+                      </a:solidFill>
+                      <a:prstDash val="solid"/>
+                    </a:lnT>
+                    <a:lnB w="12240">
+                      <a:solidFill>
+                        <a:srgbClr val="ffffff"/>
+                      </a:solidFill>
+                      <a:prstDash val="solid"/>
+                    </a:lnB>
+                    <a:solidFill>
+                      <a:srgbClr val="e8ecfc"/>
+                    </a:solidFill>
+                  </a:tcPr>
+                </a:tc>
+                <a:tc>
+                  <a:txBody>
+                    <a:bodyPr anchor="t">
+                      <a:noAutofit/>
+                    </a:bodyPr>
+                    <a:p>
+                      <a:pPr>
+                        <a:lnSpc>
+                          <a:spcPct val="100000"/>
+                        </a:lnSpc>
+                      </a:pPr>
+                      <a:r>
+                        <a:rPr b="0" lang="en-US" sz="1200" spc="-1" strike="noStrike">
+                          <a:solidFill>
+                            <a:srgbClr val="c0392b"/>
+                          </a:solidFill>
+                          <a:latin typeface="Arial"/>
+                          <a:ea typeface="Arial"/>
+                        </a:rPr>
+                        <a:t>-14.44 ※</a:t>
+                      </a:r>
+                      <a:endParaRPr b="0" lang="en-US" sz="1200" spc="-1" strike="noStrike">
+                        <a:solidFill>
+                          <a:srgbClr val="000000"/>
+                        </a:solidFill>
+                        <a:latin typeface="Arial"/>
+                      </a:endParaRPr>
+                    </a:p>
+                  </a:txBody>
+                  <a:tcPr anchor="t" marL="91440" marR="91440">
+                    <a:lnL w="12240">
+                      <a:solidFill>
+                        <a:srgbClr val="ffffff"/>
+                      </a:solidFill>
+                      <a:prstDash val="solid"/>
+                    </a:lnL>
+                    <a:lnR w="12240">
+                      <a:solidFill>
+                        <a:srgbClr val="ffffff"/>
+                      </a:solidFill>
+                      <a:prstDash val="solid"/>
+                    </a:lnR>
+                    <a:lnT w="12240">
+                      <a:solidFill>
+                        <a:srgbClr val="ffffff"/>
+                      </a:solidFill>
+                      <a:prstDash val="solid"/>
+                    </a:lnT>
+                    <a:lnB w="12240">
+                      <a:solidFill>
+                        <a:srgbClr val="ffffff"/>
+                      </a:solidFill>
+                      <a:prstDash val="solid"/>
+                    </a:lnB>
+                    <a:solidFill>
+                      <a:srgbClr val="e8ecfc"/>
+                    </a:solidFill>
+                  </a:tcPr>
+                </a:tc>
+              </a:tr>
+              <a:tr h="274320">
+                <a:tc>
+                  <a:txBody>
+                    <a:bodyPr anchor="t">
+                      <a:noAutofit/>
+                    </a:bodyPr>
+                    <a:p>
+                      <a:pPr>
+                        <a:lnSpc>
+                          <a:spcPct val="100000"/>
+                        </a:lnSpc>
+                      </a:pPr>
+                      <a:r>
+                        <a:rPr b="0" lang="en-US" sz="1200" spc="-1" strike="noStrike">
+                          <a:solidFill>
+                            <a:srgbClr val="000000"/>
+                          </a:solidFill>
+                          <a:latin typeface="Arial"/>
+                          <a:ea typeface="Arial"/>
+                        </a:rPr>
+                        <a:t>2d</a:t>
+                      </a:r>
+                      <a:endParaRPr b="0" lang="en-US" sz="1200" spc="-1" strike="noStrike">
+                        <a:solidFill>
+                          <a:srgbClr val="000000"/>
+                        </a:solidFill>
+                        <a:latin typeface="Arial"/>
+                      </a:endParaRPr>
+                    </a:p>
+                  </a:txBody>
+                  <a:tcPr anchor="t" marL="91440" marR="91440">
+                    <a:lnL w="12240">
+                      <a:solidFill>
+                        <a:srgbClr val="ffffff"/>
+                      </a:solidFill>
+                      <a:prstDash val="solid"/>
+                    </a:lnL>
+                    <a:lnR w="12240">
+                      <a:solidFill>
+                        <a:srgbClr val="ffffff"/>
+                      </a:solidFill>
+                      <a:prstDash val="solid"/>
+                    </a:lnR>
+                    <a:lnT w="12240">
+                      <a:solidFill>
+                        <a:srgbClr val="ffffff"/>
+                      </a:solidFill>
+                      <a:prstDash val="solid"/>
+                    </a:lnT>
+                    <a:lnB w="12240">
+                      <a:solidFill>
+                        <a:srgbClr val="ffffff"/>
+                      </a:solidFill>
+                      <a:prstDash val="solid"/>
+                    </a:lnB>
+                    <a:solidFill>
+                      <a:srgbClr val="ced8fa"/>
+                    </a:solidFill>
+                  </a:tcPr>
+                </a:tc>
+                <a:tc>
+                  <a:txBody>
+                    <a:bodyPr anchor="t">
+                      <a:noAutofit/>
+                    </a:bodyPr>
+                    <a:p>
+                      <a:pPr>
+                        <a:lnSpc>
+                          <a:spcPct val="100000"/>
+                        </a:lnSpc>
+                      </a:pPr>
+                      <a:r>
+                        <a:rPr b="0" lang="en-US" sz="1200" spc="-1" strike="noStrike">
+                          <a:solidFill>
+                            <a:srgbClr val="000000"/>
+                          </a:solidFill>
+                          <a:latin typeface="Arial"/>
+                          <a:ea typeface="Arial"/>
+                        </a:rPr>
+                        <a:t>DeBERTa + market floats</a:t>
+                      </a:r>
+                      <a:endParaRPr b="0" lang="en-US" sz="1200" spc="-1" strike="noStrike">
+                        <a:solidFill>
+                          <a:srgbClr val="000000"/>
+                        </a:solidFill>
+                        <a:latin typeface="Arial"/>
+                      </a:endParaRPr>
+                    </a:p>
+                  </a:txBody>
+                  <a:tcPr anchor="t" marL="91440" marR="91440">
+                    <a:lnL w="12240">
+                      <a:solidFill>
+                        <a:srgbClr val="ffffff"/>
+                      </a:solidFill>
+                      <a:prstDash val="solid"/>
+                    </a:lnL>
+                    <a:lnR w="12240">
+                      <a:solidFill>
+                        <a:srgbClr val="ffffff"/>
+                      </a:solidFill>
+                      <a:prstDash val="solid"/>
+                    </a:lnR>
+                    <a:lnT w="12240">
+                      <a:solidFill>
+                        <a:srgbClr val="ffffff"/>
+                      </a:solidFill>
+                      <a:prstDash val="solid"/>
+                    </a:lnT>
+                    <a:lnB w="12240">
+                      <a:solidFill>
+                        <a:srgbClr val="ffffff"/>
+                      </a:solidFill>
+                      <a:prstDash val="solid"/>
+                    </a:lnB>
+                    <a:solidFill>
+                      <a:srgbClr val="ced8fa"/>
+                    </a:solidFill>
+                  </a:tcPr>
+                </a:tc>
+                <a:tc>
+                  <a:txBody>
+                    <a:bodyPr anchor="t">
+                      <a:noAutofit/>
+                    </a:bodyPr>
+                    <a:p>
+                      <a:pPr>
+                        <a:lnSpc>
+                          <a:spcPct val="100000"/>
+                        </a:lnSpc>
+                      </a:pPr>
+                      <a:r>
+                        <a:rPr b="0" lang="en-US" sz="1200" spc="-1" strike="noStrike">
+                          <a:solidFill>
+                            <a:srgbClr val="000000"/>
+                          </a:solidFill>
+                          <a:latin typeface="Arial"/>
+                          <a:ea typeface="Arial"/>
+                        </a:rPr>
+                        <a:t>89.6 bps</a:t>
+                      </a:r>
+                      <a:endParaRPr b="0" lang="en-US" sz="1200" spc="-1" strike="noStrike">
+                        <a:solidFill>
+                          <a:srgbClr val="000000"/>
+                        </a:solidFill>
+                        <a:latin typeface="Arial"/>
+                      </a:endParaRPr>
+                    </a:p>
+                  </a:txBody>
+                  <a:tcPr anchor="t" marL="91440" marR="91440">
+                    <a:lnL w="12240">
+                      <a:solidFill>
+                        <a:srgbClr val="ffffff"/>
+                      </a:solidFill>
+                      <a:prstDash val="solid"/>
+                    </a:lnL>
+                    <a:lnR w="12240">
+                      <a:solidFill>
+                        <a:srgbClr val="ffffff"/>
+                      </a:solidFill>
+                      <a:prstDash val="solid"/>
+                    </a:lnR>
+                    <a:lnT w="12240">
+                      <a:solidFill>
+                        <a:srgbClr val="ffffff"/>
+                      </a:solidFill>
+                      <a:prstDash val="solid"/>
+                    </a:lnT>
+                    <a:lnB w="12240">
+                      <a:solidFill>
+                        <a:srgbClr val="ffffff"/>
+                      </a:solidFill>
+                      <a:prstDash val="solid"/>
+                    </a:lnB>
+                    <a:solidFill>
+                      <a:srgbClr val="ced8fa"/>
+                    </a:solidFill>
+                  </a:tcPr>
+                </a:tc>
+                <a:tc>
+                  <a:txBody>
+                    <a:bodyPr anchor="t">
+                      <a:noAutofit/>
+                    </a:bodyPr>
+                    <a:p>
+                      <a:pPr>
+                        <a:lnSpc>
+                          <a:spcPct val="100000"/>
+                        </a:lnSpc>
+                      </a:pPr>
+                      <a:r>
+                        <a:rPr b="0" lang="en-US" sz="1200" spc="-1" strike="noStrike">
+                          <a:solidFill>
+                            <a:srgbClr val="c0392b"/>
+                          </a:solidFill>
+                          <a:latin typeface="Arial"/>
+                          <a:ea typeface="Arial"/>
+                        </a:rPr>
+                        <a:t>-0.0015</a:t>
+                      </a:r>
+                      <a:endParaRPr b="0" lang="en-US" sz="1200" spc="-1" strike="noStrike">
+                        <a:solidFill>
+                          <a:srgbClr val="000000"/>
+                        </a:solidFill>
+                        <a:latin typeface="Arial"/>
+                      </a:endParaRPr>
+                    </a:p>
+                  </a:txBody>
+                  <a:tcPr anchor="t" marL="91440" marR="91440">
+                    <a:lnL w="12240">
+                      <a:solidFill>
+                        <a:srgbClr val="ffffff"/>
+                      </a:solidFill>
+                      <a:prstDash val="solid"/>
+                    </a:lnL>
+                    <a:lnR w="12240">
+                      <a:solidFill>
+                        <a:srgbClr val="ffffff"/>
+                      </a:solidFill>
+                      <a:prstDash val="solid"/>
+                    </a:lnR>
+                    <a:lnT w="12240">
+                      <a:solidFill>
+                        <a:srgbClr val="ffffff"/>
+                      </a:solidFill>
+                      <a:prstDash val="solid"/>
+                    </a:lnT>
+                    <a:lnB w="12240">
+                      <a:solidFill>
+                        <a:srgbClr val="ffffff"/>
+                      </a:solidFill>
+                      <a:prstDash val="solid"/>
+                    </a:lnB>
+                    <a:solidFill>
+                      <a:srgbClr val="ced8fa"/>
+                    </a:solidFill>
+                  </a:tcPr>
+                </a:tc>
+              </a:tr>
+              <a:tr h="274320">
+                <a:tc>
+                  <a:txBody>
+                    <a:bodyPr anchor="t">
+                      <a:noAutofit/>
+                    </a:bodyPr>
+                    <a:p>
+                      <a:pPr>
+                        <a:lnSpc>
+                          <a:spcPct val="100000"/>
+                        </a:lnSpc>
+                      </a:pPr>
+                      <a:r>
+                        <a:rPr b="0" lang="en-US" sz="1200" spc="-1" strike="noStrike">
+                          <a:solidFill>
+                            <a:srgbClr val="000000"/>
+                          </a:solidFill>
+                          <a:latin typeface="Arial"/>
+                          <a:ea typeface="Arial"/>
+                        </a:rPr>
+                        <a:t>2e</a:t>
+                      </a:r>
+                      <a:endParaRPr b="0" lang="en-US" sz="1200" spc="-1" strike="noStrike">
+                        <a:solidFill>
+                          <a:srgbClr val="000000"/>
+                        </a:solidFill>
+                        <a:latin typeface="Arial"/>
+                      </a:endParaRPr>
+                    </a:p>
+                  </a:txBody>
+                  <a:tcPr anchor="t" marL="91440" marR="91440">
+                    <a:lnL w="12240">
+                      <a:solidFill>
+                        <a:srgbClr val="ffffff"/>
+                      </a:solidFill>
+                      <a:prstDash val="solid"/>
+                    </a:lnL>
+                    <a:lnR w="12240">
+                      <a:solidFill>
+                        <a:srgbClr val="ffffff"/>
+                      </a:solidFill>
+                      <a:prstDash val="solid"/>
+                    </a:lnR>
+                    <a:lnT w="12240">
+                      <a:solidFill>
+                        <a:srgbClr val="ffffff"/>
+                      </a:solidFill>
+                      <a:prstDash val="solid"/>
+                    </a:lnT>
+                    <a:lnB w="12240">
+                      <a:solidFill>
+                        <a:srgbClr val="ffffff"/>
+                      </a:solidFill>
+                      <a:prstDash val="solid"/>
+                    </a:lnB>
+                    <a:solidFill>
+                      <a:srgbClr val="e8ecfc"/>
+                    </a:solidFill>
+                  </a:tcPr>
+                </a:tc>
+                <a:tc>
+                  <a:txBody>
+                    <a:bodyPr anchor="t">
+                      <a:noAutofit/>
+                    </a:bodyPr>
+                    <a:p>
+                      <a:pPr>
+                        <a:lnSpc>
+                          <a:spcPct val="100000"/>
+                        </a:lnSpc>
+                      </a:pPr>
+                      <a:r>
+                        <a:rPr b="0" lang="en-US" sz="1200" spc="-1" strike="noStrike">
+                          <a:solidFill>
+                            <a:srgbClr val="000000"/>
+                          </a:solidFill>
+                          <a:latin typeface="Arial"/>
+                          <a:ea typeface="Arial"/>
+                        </a:rPr>
+                        <a:t>Tree on 10 features (no text)</a:t>
+                      </a:r>
+                      <a:endParaRPr b="0" lang="en-US" sz="1200" spc="-1" strike="noStrike">
+                        <a:solidFill>
+                          <a:srgbClr val="000000"/>
+                        </a:solidFill>
+                        <a:latin typeface="Arial"/>
+                      </a:endParaRPr>
+                    </a:p>
+                  </a:txBody>
+                  <a:tcPr anchor="t" marL="91440" marR="91440">
+                    <a:lnL w="12240">
+                      <a:solidFill>
+                        <a:srgbClr val="ffffff"/>
+                      </a:solidFill>
+                      <a:prstDash val="solid"/>
+                    </a:lnL>
+                    <a:lnR w="12240">
+                      <a:solidFill>
+                        <a:srgbClr val="ffffff"/>
+                      </a:solidFill>
+                      <a:prstDash val="solid"/>
+                    </a:lnR>
+                    <a:lnT w="12240">
+                      <a:solidFill>
+                        <a:srgbClr val="ffffff"/>
+                      </a:solidFill>
+                      <a:prstDash val="solid"/>
+                    </a:lnT>
+                    <a:lnB w="12240">
+                      <a:solidFill>
+                        <a:srgbClr val="ffffff"/>
+                      </a:solidFill>
+                      <a:prstDash val="solid"/>
+                    </a:lnB>
+                    <a:solidFill>
+                      <a:srgbClr val="e8ecfc"/>
+                    </a:solidFill>
+                  </a:tcPr>
+                </a:tc>
+                <a:tc>
+                  <a:txBody>
+                    <a:bodyPr anchor="t">
+                      <a:noAutofit/>
+                    </a:bodyPr>
+                    <a:p>
+                      <a:pPr>
+                        <a:lnSpc>
+                          <a:spcPct val="100000"/>
+                        </a:lnSpc>
+                      </a:pPr>
+                      <a:r>
+                        <a:rPr b="0" lang="en-US" sz="1200" spc="-1" strike="noStrike">
+                          <a:solidFill>
+                            <a:srgbClr val="000000"/>
+                          </a:solidFill>
+                          <a:latin typeface="Arial"/>
+                          <a:ea typeface="Arial"/>
+                        </a:rPr>
+                        <a:t>~98 bps</a:t>
+                      </a:r>
+                      <a:endParaRPr b="0" lang="en-US" sz="1200" spc="-1" strike="noStrike">
+                        <a:solidFill>
+                          <a:srgbClr val="000000"/>
+                        </a:solidFill>
+                        <a:latin typeface="Arial"/>
+                      </a:endParaRPr>
+                    </a:p>
+                  </a:txBody>
+                  <a:tcPr anchor="t" marL="91440" marR="91440">
+                    <a:lnL w="12240">
+                      <a:solidFill>
+                        <a:srgbClr val="ffffff"/>
+                      </a:solidFill>
+                      <a:prstDash val="solid"/>
+                    </a:lnL>
+                    <a:lnR w="12240">
+                      <a:solidFill>
+                        <a:srgbClr val="ffffff"/>
+                      </a:solidFill>
+                      <a:prstDash val="solid"/>
+                    </a:lnR>
+                    <a:lnT w="12240">
+                      <a:solidFill>
+                        <a:srgbClr val="ffffff"/>
+                      </a:solidFill>
+                      <a:prstDash val="solid"/>
+                    </a:lnT>
+                    <a:lnB w="12240">
+                      <a:solidFill>
+                        <a:srgbClr val="ffffff"/>
+                      </a:solidFill>
+                      <a:prstDash val="solid"/>
+                    </a:lnB>
+                    <a:solidFill>
+                      <a:srgbClr val="e8ecfc"/>
+                    </a:solidFill>
+                  </a:tcPr>
+                </a:tc>
+                <a:tc>
+                  <a:txBody>
+                    <a:bodyPr anchor="t">
+                      <a:noAutofit/>
+                    </a:bodyPr>
+                    <a:p>
+                      <a:pPr>
+                        <a:lnSpc>
+                          <a:spcPct val="100000"/>
+                        </a:lnSpc>
+                      </a:pPr>
+                      <a:r>
+                        <a:rPr b="0" lang="en-US" sz="1200" spc="-1" strike="noStrike">
+                          <a:solidFill>
+                            <a:srgbClr val="c0392b"/>
+                          </a:solidFill>
+                          <a:latin typeface="Arial"/>
+                          <a:ea typeface="Arial"/>
+                        </a:rPr>
+                        <a:t>-0.1559</a:t>
+                      </a:r>
+                      <a:endParaRPr b="0" lang="en-US" sz="1200" spc="-1" strike="noStrike">
+                        <a:solidFill>
+                          <a:srgbClr val="000000"/>
+                        </a:solidFill>
+                        <a:latin typeface="Arial"/>
+                      </a:endParaRPr>
+                    </a:p>
+                  </a:txBody>
+                  <a:tcPr anchor="t" marL="91440" marR="91440">
+                    <a:lnL w="12240">
+                      <a:solidFill>
+                        <a:srgbClr val="ffffff"/>
+                      </a:solidFill>
+                      <a:prstDash val="solid"/>
+                    </a:lnL>
+                    <a:lnR w="12240">
+                      <a:solidFill>
+                        <a:srgbClr val="ffffff"/>
+                      </a:solidFill>
+                      <a:prstDash val="solid"/>
+                    </a:lnR>
+                    <a:lnT w="12240">
+                      <a:solidFill>
+                        <a:srgbClr val="ffffff"/>
+                      </a:solidFill>
+                      <a:prstDash val="solid"/>
+                    </a:lnT>
+                    <a:lnB w="12240">
+                      <a:solidFill>
+                        <a:srgbClr val="ffffff"/>
+                      </a:solidFill>
+                      <a:prstDash val="solid"/>
+                    </a:lnB>
+                    <a:solidFill>
+                      <a:srgbClr val="e8ecfc"/>
+                    </a:solidFill>
+                  </a:tcPr>
+                </a:tc>
+              </a:tr>
+            </a:tbl>
+          </a:graphicData>
+        </a:graphic>
+      </p:graphicFrame>
+      <p:sp>
+        <p:nvSpPr>
+          <p:cNvPr id="99" name="TextBox 3"/>
+          <p:cNvSpPr/>
+          <p:nvPr/>
+        </p:nvSpPr>
+        <p:spPr>
+          <a:xfrm>
+            <a:off x="311040" y="4023360"/>
+            <a:ext cx="8521920" cy="288000"/>
+          </a:xfrm>
+          <a:prstGeom prst="rect">
+            <a:avLst/>
+          </a:prstGeom>
+          <a:noFill/>
+          <a:ln w="0">
+            <a:noFill/>
+          </a:ln>
+        </p:spPr>
+        <p:style>
+          <a:lnRef idx="0"/>
+          <a:fillRef idx="0"/>
+          <a:effectRef idx="0"/>
+          <a:fontRef idx="minor"/>
+        </p:style>
+        <p:txBody>
+          <a:bodyPr lIns="90000" rIns="90000" tIns="45000" bIns="45000" anchor="t">
+            <a:spAutoFit/>
+          </a:bodyPr>
+          <a:p>
+            <a:pPr algn="ctr">
+              <a:lnSpc>
+                <a:spcPct val="100000"/>
+              </a:lnSpc>
+            </a:pPr>
+            <a:r>
+              <a:rPr b="1" lang="en-US" sz="1300" spc="-1" strike="noStrike">
+                <a:solidFill>
+                  <a:srgbClr val="c0392b"/>
+                </a:solidFill>
+                <a:latin typeface="Arial"/>
+                <a:ea typeface="Arial"/>
+              </a:rPr>
+              <a:t>Best model = the constant.   50× the capacity → the same flat line (prediction spread 2.6–2.8%).</a:t>
+            </a:r>
+            <a:endParaRPr b="0" lang="en-US" sz="1300" spc="-1" strike="noStrike">
+              <a:solidFill>
+                <a:srgbClr val="000000"/>
+              </a:solidFill>
+              <a:latin typeface="Arial"/>
+            </a:endParaRPr>
+          </a:p>
+        </p:txBody>
+      </p:sp>
+    </p:spTree>
+  </p:cSld>
+  <mc:AlternateContent>
+    <mc:Choice Requires="p14">
+      <p:transition spd="slow" p14:dur="2000"/>
+    </mc:Choice>
+    <mc:Fallback>
+      <p:transition spd="slow"/>
+    </mc:Fallback>
+  </mc:AlternateContent>
+</p:sld>
+</file>
+
+<file path=ppt/slides/slide21.xml><?xml version="1.0" encoding="utf-8"?>
+<p:sld xmlns:a="http://schemas.openxmlformats.org/drawingml/2006/main" xmlns:p="http://schemas.openxmlformats.org/presentationml/2006/main" xmlns:r="http://schemas.openxmlformats.org/officeDocument/2006/relationships" xmlns:p14="http://schemas.microsoft.com/office/powerpoint/2010/main" xmlns:p15="http://schemas.microsoft.com/office/powerpoint/2012/main" xmlns:mc="http://schemas.openxmlformats.org/markup-compatibility/2006">
+  <p:cSld>
+    <p:spTree>
+      <p:nvGrpSpPr>
+        <p:cNvPr id="1" name=""/>
+        <p:cNvGrpSpPr/>
+        <p:nvPr/>
+      </p:nvGrpSpPr>
+      <p:grpSpPr>
+        <a:xfrm>
+          <a:off x="0" y="0"/>
+          <a:ext cx="0" cy="0"/>
+          <a:chOff x="0" y="0"/>
+          <a:chExt cx="0" cy="0"/>
+        </a:xfrm>
+      </p:grpSpPr>
+      <p:sp>
+        <p:nvSpPr>
           <p:cNvPr id="100" name="PlaceHolder 1"/>
           <p:cNvSpPr>
             <a:spLocks noGrp="1"/>
@@ -16285,7 +16501,7 @@
 </p:sld>
 </file>
 
-<file path=ppt/slides/slide21.xml><?xml version="1.0" encoding="utf-8"?>
+<file path=ppt/slides/slide22.xml><?xml version="1.0" encoding="utf-8"?>
 <p:sld xmlns:a="http://schemas.openxmlformats.org/drawingml/2006/main" xmlns:p="http://schemas.openxmlformats.org/presentationml/2006/main" xmlns:r="http://schemas.openxmlformats.org/officeDocument/2006/relationships" xmlns:p14="http://schemas.microsoft.com/office/powerpoint/2010/main" xmlns:p15="http://schemas.microsoft.com/office/powerpoint/2012/main" xmlns:mc="http://schemas.openxmlformats.org/markup-compatibility/2006">
   <p:cSld>
     <p:spTree>
@@ -16445,7 +16661,7 @@
 </p:sld>
 </file>
 
-<file path=ppt/slides/slide22.xml><?xml version="1.0" encoding="utf-8"?>
+<file path=ppt/slides/slide23.xml><?xml version="1.0" encoding="utf-8"?>
 <p:sld xmlns:a="http://schemas.openxmlformats.org/drawingml/2006/main" xmlns:p="http://schemas.openxmlformats.org/presentationml/2006/main" xmlns:r="http://schemas.openxmlformats.org/officeDocument/2006/relationships" xmlns:p14="http://schemas.microsoft.com/office/powerpoint/2010/main" xmlns:p15="http://schemas.microsoft.com/office/powerpoint/2012/main" xmlns:mc="http://schemas.openxmlformats.org/markup-compatibility/2006">
   <p:cSld>
     <p:spTree>
@@ -17558,7 +17774,7 @@
 </p:sld>
 </file>
 
-<file path=ppt/slides/slide23.xml><?xml version="1.0" encoding="utf-8"?>
+<file path=ppt/slides/slide24.xml><?xml version="1.0" encoding="utf-8"?>
 <p:sld xmlns:a="http://schemas.openxmlformats.org/drawingml/2006/main" xmlns:p="http://schemas.openxmlformats.org/presentationml/2006/main" xmlns:r="http://schemas.openxmlformats.org/officeDocument/2006/relationships" xmlns:p14="http://schemas.microsoft.com/office/powerpoint/2010/main" xmlns:p15="http://schemas.microsoft.com/office/powerpoint/2012/main" xmlns:mc="http://schemas.openxmlformats.org/markup-compatibility/2006">
   <p:cSld>
     <p:spTree>
@@ -17708,7 +17924,7 @@
 </p:sld>
 </file>
 
-<file path=ppt/slides/slide24.xml><?xml version="1.0" encoding="utf-8"?>
+<file path=ppt/slides/slide25.xml><?xml version="1.0" encoding="utf-8"?>
 <p:sld xmlns:a="http://schemas.openxmlformats.org/drawingml/2006/main" xmlns:p="http://schemas.openxmlformats.org/presentationml/2006/main" xmlns:r="http://schemas.openxmlformats.org/officeDocument/2006/relationships" xmlns:p14="http://schemas.microsoft.com/office/powerpoint/2010/main" xmlns:p15="http://schemas.microsoft.com/office/powerpoint/2012/main" xmlns:mc="http://schemas.openxmlformats.org/markup-compatibility/2006">
   <p:cSld>
     <p:spTree>
@@ -19924,7 +20140,7 @@
 </file>
 
 <file path=ppt/slides/slide9.xml><?xml version="1.0" encoding="utf-8"?>
-<p:sld xmlns:a="http://schemas.openxmlformats.org/drawingml/2006/main" xmlns:p="http://schemas.openxmlformats.org/presentationml/2006/main" xmlns:r="http://schemas.openxmlformats.org/officeDocument/2006/relationships" xmlns:p14="http://schemas.microsoft.com/office/powerpoint/2010/main" xmlns:p15="http://schemas.microsoft.com/office/powerpoint/2012/main" xmlns:mc="http://schemas.openxmlformats.org/markup-compatibility/2006">
+<p:sld xmlns:a="http://schemas.openxmlformats.org/drawingml/2006/main" xmlns:p="http://schemas.openxmlformats.org/presentationml/2006/main" xmlns:r="http://schemas.openxmlformats.org/officeDocument/2006/relationships">
   <p:cSld>
     <p:spTree>
       <p:nvGrpSpPr>
@@ -19932,17 +20148,10 @@
         <p:cNvGrpSpPr/>
         <p:nvPr/>
       </p:nvGrpSpPr>
-      <p:grpSpPr>
-        <a:xfrm>
-          <a:off x="0" y="0"/>
-          <a:ext cx="0" cy="0"/>
-          <a:chOff x="0" y="0"/>
-          <a:chExt cx="0" cy="0"/>
-        </a:xfrm>
-      </p:grpSpPr>
+      <p:grpSpPr/>
       <p:sp>
         <p:nvSpPr>
-          <p:cNvPr id="60" name="PlaceHolder 1"/>
+          <p:cNvPr id="2" name="Title 1"/>
           <p:cNvSpPr>
             <a:spLocks noGrp="1"/>
           </p:cNvSpPr>
@@ -19950,103 +20159,98 @@
             <p:ph type="title"/>
           </p:nvPr>
         </p:nvSpPr>
+        <p:spPr/>
+        <p:txBody>
+          <a:bodyPr/>
+          <a:lstStyle/>
+          <a:p>
+            <a:r>
+              <a:t>Is 90 minutes even the right horizon?</a:t>
+            </a:r>
+          </a:p>
+        </p:txBody>
+      </p:sp>
+      <p:sp>
+        <p:nvSpPr>
+          <p:cNvPr id="3" name="Content Placeholder 2"/>
+          <p:cNvSpPr>
+            <a:spLocks noGrp="1"/>
+          </p:cNvSpPr>
+          <p:nvPr>
+            <p:ph/>
+          </p:nvPr>
+        </p:nvSpPr>
+        <p:spPr/>
+        <p:txBody>
+          <a:bodyPr/>
+          <a:lstStyle/>
+          <a:p/>
+        </p:txBody>
+      </p:sp>
+      <p:pic>
+        <p:nvPicPr>
+          <p:cNvPr id="4" name="Picture 3" descr="15-sentiment-vs-gain-heatmap.png"/>
+          <p:cNvPicPr>
+            <a:picLocks noChangeAspect="1"/>
+          </p:cNvPicPr>
+          <p:nvPr/>
+        </p:nvPicPr>
+        <p:blipFill>
+          <a:blip r:embed="rId2"/>
+          <a:stretch>
+            <a:fillRect/>
+          </a:stretch>
+        </p:blipFill>
         <p:spPr>
           <a:xfrm>
-            <a:off x="311760" y="744480"/>
-            <a:ext cx="8520120" cy="2052360"/>
+            <a:off x="2979198" y="1051560"/>
+            <a:ext cx="3185604" cy="3177540"/>
+          </a:xfrm>
+          <a:prstGeom prst="rect">
+            <a:avLst/>
+          </a:prstGeom>
+        </p:spPr>
+      </p:pic>
+      <p:sp>
+        <p:nvSpPr>
+          <p:cNvPr id="5" name="TextBox 4"/>
+          <p:cNvSpPr txBox="1"/>
+          <p:nvPr/>
+        </p:nvSpPr>
+        <p:spPr>
+          <a:xfrm>
+            <a:off x="310896" y="4366260"/>
+            <a:ext cx="8522208" cy="548640"/>
           </a:xfrm>
           <a:prstGeom prst="rect">
             <a:avLst/>
           </a:prstGeom>
           <a:noFill/>
-          <a:ln w="0">
-            <a:noFill/>
-          </a:ln>
         </p:spPr>
         <p:txBody>
-          <a:bodyPr lIns="91440" rIns="91440" tIns="91440" bIns="91440" anchor="b">
-            <a:normAutofit/>
+          <a:bodyPr wrap="square">
+            <a:spAutoFit/>
           </a:bodyPr>
-          <a:p>
-            <a:pPr indent="0" algn="ctr">
-              <a:lnSpc>
-                <a:spcPct val="100000"/>
-              </a:lnSpc>
-              <a:buNone/>
-              <a:tabLst>
-                <a:tab algn="l" pos="0"/>
-              </a:tabLst>
-            </a:pPr>
-            <a:r>
-              <a:rPr b="0" lang="en" sz="5200" spc="-1" strike="noStrike">
-                <a:solidFill>
-                  <a:schemeClr val="dk1"/>
-                </a:solidFill>
-                <a:latin typeface="Arial"/>
-                <a:ea typeface="Arial"/>
-              </a:rPr>
-              <a:t>Architecture</a:t>
-            </a:r>
-            <a:endParaRPr b="0" lang="en-US" sz="5200" spc="-1" strike="noStrike">
-              <a:solidFill>
-                <a:srgbClr val="000000"/>
-              </a:solidFill>
-              <a:latin typeface="Arial"/>
-            </a:endParaRPr>
-          </a:p>
-        </p:txBody>
-      </p:sp>
-      <p:sp>
-        <p:nvSpPr>
-          <p:cNvPr id="61" name="PlaceHolder 2"/>
-          <p:cNvSpPr>
-            <a:spLocks noGrp="1"/>
-          </p:cNvSpPr>
-          <p:nvPr>
-            <p:ph type="subTitle"/>
-          </p:nvPr>
-        </p:nvSpPr>
-        <p:spPr>
-          <a:xfrm>
-            <a:off x="311760" y="2834280"/>
-            <a:ext cx="8520120" cy="792360"/>
-          </a:xfrm>
-          <a:prstGeom prst="rect">
-            <a:avLst/>
-          </a:prstGeom>
-          <a:noFill/>
-          <a:ln w="0">
-            <a:noFill/>
-          </a:ln>
-        </p:spPr>
-        <p:txBody>
-          <a:bodyPr lIns="91440" rIns="91440" tIns="91440" bIns="91440" anchor="t">
-            <a:normAutofit/>
-          </a:bodyPr>
-          <a:p>
-            <a:pPr indent="0" algn="ctr">
-              <a:buNone/>
-            </a:pPr>
-            <a:endParaRPr b="0" lang="en-US" sz="2800" spc="-1" strike="noStrike">
-              <a:solidFill>
-                <a:schemeClr val="dk2"/>
-              </a:solidFill>
-              <a:latin typeface="Arial"/>
-              <a:ea typeface="Arial"/>
-            </a:endParaRPr>
+          <a:lstStyle/>
+          <a:p>
+            <a:pPr algn="ctr">
+              <a:defRPr sz="1400" b="1">
+                <a:solidFill>
+                  <a:srgbClr val="C0392B"/>
+                </a:solidFill>
+              </a:defRPr>
+            </a:pPr>
+            <a:r>
+              <a:t>52% of articles move less than ±0.5%.  Of the rest: 50.2% down / 49.8% up.</a:t>
+            </a:r>
           </a:p>
         </p:txBody>
       </p:sp>
     </p:spTree>
   </p:cSld>
-  <mc:AlternateContent>
-    <mc:Choice Requires="p14">
-      <p:transition spd="slow" p14:dur="2000"/>
-    </mc:Choice>
-    <mc:Fallback>
-      <p:transition spd="slow"/>
-    </mc:Fallback>
-  </mc:AlternateContent>
+  <p:clrMapOvr>
+    <a:masterClrMapping/>
+  </p:clrMapOvr>
 </p:sld>
 </file>
 
